--- a/deliverables/pitch_deck.pptx
+++ b/deliverables/pitch_deck.pptx
@@ -3099,48 +3099,44 @@
       <p:grpSpPr/>
       <p:sp>
         <p:nvSpPr>
-          <p:cNvPr id="2" name="TextBox 1"/>
-          <p:cNvSpPr txBox="1"/>
-          <p:nvPr/>
-        </p:nvSpPr>
-        <p:spPr>
-          <a:xfrm>
-            <a:off x="731520" y="548640"/>
-            <a:ext cx="10698480" cy="1005840"/>
+          <p:cNvPr id="2" name="Rectangle 1"/>
+          <p:cNvSpPr/>
+          <p:nvPr/>
+        </p:nvSpPr>
+        <p:spPr>
+          <a:xfrm>
+            <a:off x="0" y="0"/>
+            <a:ext cx="12191695" cy="6858000"/>
           </a:xfrm>
           <a:prstGeom prst="rect">
             <a:avLst/>
           </a:prstGeom>
-          <a:noFill/>
-        </p:spPr>
-        <p:txBody>
-          <a:bodyPr wrap="square">
-            <a:spAutoFit/>
-          </a:bodyPr>
-          <a:lstStyle/>
-          <a:p>
-            <a:pPr>
-              <a:defRPr sz="2800" b="1">
-                <a:solidFill>
-                  <a:srgbClr val="0F172A"/>
-                </a:solidFill>
-              </a:defRPr>
-            </a:pPr>
-            <a:r>
-              <a:t>SIGNALFIRE AI</a:t>
-            </a:r>
-          </a:p>
-          <a:p>
-            <a:pPr>
-              <a:defRPr sz="1300">
-                <a:solidFill>
-                  <a:srgbClr val="6366F1"/>
-                </a:solidFill>
-              </a:defRPr>
-            </a:pPr>
-            <a:r>
-              <a:t>Find the warning signs hidden across your data.</a:t>
-            </a:r>
+          <a:solidFill>
+            <a:srgbClr val="F8FAFC"/>
+          </a:solidFill>
+          <a:ln>
+            <a:noFill/>
+          </a:ln>
+        </p:spPr>
+        <p:style>
+          <a:lnRef idx="1">
+            <a:schemeClr val="accent1"/>
+          </a:lnRef>
+          <a:fillRef idx="3">
+            <a:schemeClr val="accent1"/>
+          </a:fillRef>
+          <a:effectRef idx="2">
+            <a:schemeClr val="accent1"/>
+          </a:effectRef>
+          <a:fontRef idx="minor">
+            <a:schemeClr val="lt1"/>
+          </a:fontRef>
+        </p:style>
+        <p:txBody>
+          <a:bodyPr rtlCol="0" anchor="ctr"/>
+          <a:lstStyle/>
+          <a:p>
+            <a:pPr algn="ctr"/>
           </a:p>
         </p:txBody>
       </p:sp>
@@ -3152,14 +3148,14 @@
         </p:nvSpPr>
         <p:spPr>
           <a:xfrm>
-            <a:off x="731520" y="1645920"/>
+            <a:off x="731520" y="1097280"/>
             <a:ext cx="10728655" cy="4663440"/>
           </a:xfrm>
           <a:prstGeom prst="roundRect">
             <a:avLst/>
           </a:prstGeom>
           <a:solidFill>
-            <a:srgbClr val="F8FAFC"/>
+            <a:srgbClr val="FFFFFF"/>
           </a:solidFill>
           <a:ln w="19050">
             <a:solidFill>
@@ -3197,8 +3193,8 @@
         </p:nvSpPr>
         <p:spPr>
           <a:xfrm>
-            <a:off x="1005840" y="1828800"/>
-            <a:ext cx="10149840" cy="4297680"/>
+            <a:off x="1097280" y="1463040"/>
+            <a:ext cx="10058400" cy="3931920"/>
           </a:xfrm>
           <a:prstGeom prst="rect">
             <a:avLst/>
@@ -3212,47 +3208,74 @@
           <a:lstStyle/>
           <a:p>
             <a:pPr>
-              <a:spcAft>
+              <a:defRPr sz="1100" b="1">
+                <a:solidFill>
+                  <a:srgbClr val="6366F1"/>
+                </a:solidFill>
+              </a:defRPr>
+            </a:pPr>
+            <a:r>
+              <a:t>EXATHON 2026 HACKATHON ENTRY</a:t>
+            </a:r>
+          </a:p>
+          <a:p>
+            <a:pPr>
+              <a:spcBef>
                 <a:spcPts val="1000"/>
-              </a:spcAft>
-              <a:defRPr sz="1350">
+              </a:spcBef>
+              <a:defRPr sz="4400" b="1">
                 <a:solidFill>
                   <a:srgbClr val="0F172A"/>
                 </a:solidFill>
               </a:defRPr>
             </a:pPr>
             <a:r>
-              <a:t>• Demonstration Domain: Enterprise Retail &amp; Supply Chain Operations</a:t>
-            </a:r>
-          </a:p>
-          <a:p>
-            <a:pPr>
-              <a:spcAft>
-                <a:spcPts val="1000"/>
-              </a:spcAft>
-              <a:defRPr sz="1350">
+              <a:t>SIGNALFIRE AI</a:t>
+            </a:r>
+          </a:p>
+          <a:p>
+            <a:pPr>
+              <a:spcBef>
+                <a:spcPts val="600"/>
+              </a:spcBef>
+              <a:defRPr sz="2000" b="1">
+                <a:solidFill>
+                  <a:srgbClr val="0284C7"/>
+                </a:solidFill>
+              </a:defRPr>
+            </a:pPr>
+            <a:r>
+              <a:t>Find the warning signs hidden across your data.</a:t>
+            </a:r>
+          </a:p>
+          <a:p>
+            <a:pPr>
+              <a:spcBef>
+                <a:spcPts val="1400"/>
+              </a:spcBef>
+              <a:defRPr sz="1300">
+                <a:solidFill>
+                  <a:srgbClr val="64748B"/>
+                </a:solidFill>
+              </a:defRPr>
+            </a:pPr>
+            <a:r>
+              <a:t>An enterprise decision-support platform that unifies fragmented operational telemetry, detects cross-dataset lead-lag risk cascades, and provides evidence-grounded investigation support. Powered by Exasol Personal with local DuckDB in-process OLAP fallback.</a:t>
+            </a:r>
+          </a:p>
+          <a:p>
+            <a:pPr>
+              <a:spcBef>
+                <a:spcPts val="1800"/>
+              </a:spcBef>
+              <a:defRPr sz="1100" b="1">
                 <a:solidFill>
                   <a:srgbClr val="0F172A"/>
                 </a:solidFill>
               </a:defRPr>
             </a:pPr>
             <a:r>
-              <a:t>• Built with Exasol Personal, FastAPI, React, and Robust Multi-Metric Analytics</a:t>
-            </a:r>
-          </a:p>
-          <a:p>
-            <a:pPr>
-              <a:spcAft>
-                <a:spcPts val="1000"/>
-              </a:spcAft>
-              <a:defRPr sz="1350">
-                <a:solidFill>
-                  <a:srgbClr val="0F172A"/>
-                </a:solidFill>
-              </a:defRPr>
-            </a:pPr>
-            <a:r>
-              <a:t>• Autonomous Hackathon Submission 2026</a:t>
+              <a:t>Domain Demonstrations: Retail Commerce Logistics &amp; Industrial MRO Equipment Reliability</a:t>
             </a:r>
           </a:p>
         </p:txBody>
@@ -3277,72 +3300,23 @@
       <p:grpSpPr/>
       <p:sp>
         <p:nvSpPr>
-          <p:cNvPr id="2" name="TextBox 1"/>
-          <p:cNvSpPr txBox="1"/>
-          <p:nvPr/>
-        </p:nvSpPr>
-        <p:spPr>
-          <a:xfrm>
-            <a:off x="731520" y="548640"/>
-            <a:ext cx="10698480" cy="1005840"/>
+          <p:cNvPr id="2" name="Rectangle 1"/>
+          <p:cNvSpPr/>
+          <p:nvPr/>
+        </p:nvSpPr>
+        <p:spPr>
+          <a:xfrm>
+            <a:off x="0" y="0"/>
+            <a:ext cx="12191695" cy="6858000"/>
           </a:xfrm>
           <a:prstGeom prst="rect">
-            <a:avLst/>
-          </a:prstGeom>
-          <a:noFill/>
-        </p:spPr>
-        <p:txBody>
-          <a:bodyPr wrap="square">
-            <a:spAutoFit/>
-          </a:bodyPr>
-          <a:lstStyle/>
-          <a:p>
-            <a:pPr>
-              <a:defRPr sz="2800" b="1">
-                <a:solidFill>
-                  <a:srgbClr val="0F172A"/>
-                </a:solidFill>
-              </a:defRPr>
-            </a:pPr>
-            <a:r>
-              <a:t>Future Roadmap &amp; Project Conclusion</a:t>
-            </a:r>
-          </a:p>
-          <a:p>
-            <a:pPr>
-              <a:defRPr sz="1300">
-                <a:solidFill>
-                  <a:srgbClr val="6366F1"/>
-                </a:solidFill>
-              </a:defRPr>
-            </a:pPr>
-            <a:r>
-              <a:t>Scaling cross-dataset intelligence for enterprise operations</a:t>
-            </a:r>
-          </a:p>
-        </p:txBody>
-      </p:sp>
-      <p:sp>
-        <p:nvSpPr>
-          <p:cNvPr id="3" name="Rounded Rectangle 2"/>
-          <p:cNvSpPr/>
-          <p:nvPr/>
-        </p:nvSpPr>
-        <p:spPr>
-          <a:xfrm>
-            <a:off x="731520" y="1645920"/>
-            <a:ext cx="10728655" cy="4663440"/>
-          </a:xfrm>
-          <a:prstGeom prst="roundRect">
             <a:avLst/>
           </a:prstGeom>
           <a:solidFill>
             <a:srgbClr val="F8FAFC"/>
           </a:solidFill>
-          <a:ln w="19050">
-            <a:solidFill>
-              <a:srgbClr val="E2E8F0"/>
-            </a:solidFill>
+          <a:ln>
+            <a:noFill/>
           </a:ln>
         </p:spPr>
         <p:style>
@@ -3369,14 +3343,14 @@
       </p:sp>
       <p:sp>
         <p:nvSpPr>
-          <p:cNvPr id="4" name="TextBox 3"/>
+          <p:cNvPr id="3" name="TextBox 2"/>
           <p:cNvSpPr txBox="1"/>
           <p:nvPr/>
         </p:nvSpPr>
         <p:spPr>
           <a:xfrm>
-            <a:off x="1005840" y="1828800"/>
-            <a:ext cx="10149840" cy="4297680"/>
+            <a:off x="731520" y="365760"/>
+            <a:ext cx="7315200" cy="365760"/>
           </a:xfrm>
           <a:prstGeom prst="rect">
             <a:avLst/>
@@ -3390,62 +3364,502 @@
           <a:lstStyle/>
           <a:p>
             <a:pPr>
-              <a:spcAft>
-                <a:spcPts val="1000"/>
-              </a:spcAft>
-              <a:defRPr sz="1350">
+              <a:defRPr sz="1000" b="1">
+                <a:solidFill>
+                  <a:srgbClr val="6366F1"/>
+                </a:solidFill>
+                <a:latin typeface="Arial"/>
+              </a:defRPr>
+            </a:pPr>
+            <a:r>
+              <a:t>CONCLUSION</a:t>
+            </a:r>
+          </a:p>
+        </p:txBody>
+      </p:sp>
+      <p:sp>
+        <p:nvSpPr>
+          <p:cNvPr id="4" name="TextBox 3"/>
+          <p:cNvSpPr txBox="1"/>
+          <p:nvPr/>
+        </p:nvSpPr>
+        <p:spPr>
+          <a:xfrm>
+            <a:off x="731520" y="640080"/>
+            <a:ext cx="10515600" cy="640080"/>
+          </a:xfrm>
+          <a:prstGeom prst="rect">
+            <a:avLst/>
+          </a:prstGeom>
+          <a:noFill/>
+        </p:spPr>
+        <p:txBody>
+          <a:bodyPr wrap="square">
+            <a:spAutoFit/>
+          </a:bodyPr>
+          <a:lstStyle/>
+          <a:p>
+            <a:pPr>
+              <a:defRPr sz="2400" b="1">
                 <a:solidFill>
                   <a:srgbClr val="0F172A"/>
                 </a:solidFill>
-              </a:defRPr>
-            </a:pPr>
-            <a:r>
-              <a:t>• Distributed Exasol Analytics: Scaling from Exasol Personal to multi-node Exasol clusters for multi-billion record datasets.</a:t>
-            </a:r>
-          </a:p>
-          <a:p>
-            <a:pPr>
-              <a:spcAft>
-                <a:spcPts val="1000"/>
-              </a:spcAft>
-              <a:defRPr sz="1350">
+                <a:latin typeface="Arial"/>
+              </a:defRPr>
+            </a:pPr>
+            <a:r>
+              <a:t>Delivering Operational Resilience</a:t>
+            </a:r>
+          </a:p>
+        </p:txBody>
+      </p:sp>
+      <p:sp>
+        <p:nvSpPr>
+          <p:cNvPr id="5" name="TextBox 4"/>
+          <p:cNvSpPr txBox="1"/>
+          <p:nvPr/>
+        </p:nvSpPr>
+        <p:spPr>
+          <a:xfrm>
+            <a:off x="731520" y="1234440"/>
+            <a:ext cx="10515600" cy="457200"/>
+          </a:xfrm>
+          <a:prstGeom prst="rect">
+            <a:avLst/>
+          </a:prstGeom>
+          <a:noFill/>
+        </p:spPr>
+        <p:txBody>
+          <a:bodyPr wrap="square">
+            <a:spAutoFit/>
+          </a:bodyPr>
+          <a:lstStyle/>
+          <a:p>
+            <a:pPr>
+              <a:defRPr sz="1200">
+                <a:solidFill>
+                  <a:srgbClr val="64748B"/>
+                </a:solidFill>
+                <a:latin typeface="Arial"/>
+              </a:defRPr>
+            </a:pPr>
+            <a:r>
+              <a:t>SIGNALFIRE AI: Transforming hidden warning signs into proactive business interventions</a:t>
+            </a:r>
+          </a:p>
+        </p:txBody>
+      </p:sp>
+      <p:sp>
+        <p:nvSpPr>
+          <p:cNvPr id="6" name="Rounded Rectangle 5"/>
+          <p:cNvSpPr/>
+          <p:nvPr/>
+        </p:nvSpPr>
+        <p:spPr>
+          <a:xfrm>
+            <a:off x="731520" y="1828800"/>
+            <a:ext cx="5120640" cy="4206240"/>
+          </a:xfrm>
+          <a:prstGeom prst="roundRect">
+            <a:avLst/>
+          </a:prstGeom>
+          <a:solidFill>
+            <a:srgbClr val="FFFFFF"/>
+          </a:solidFill>
+          <a:ln w="12700">
+            <a:solidFill>
+              <a:srgbClr val="E2E8F0"/>
+            </a:solidFill>
+          </a:ln>
+        </p:spPr>
+        <p:style>
+          <a:lnRef idx="1">
+            <a:schemeClr val="accent1"/>
+          </a:lnRef>
+          <a:fillRef idx="3">
+            <a:schemeClr val="accent1"/>
+          </a:fillRef>
+          <a:effectRef idx="2">
+            <a:schemeClr val="accent1"/>
+          </a:effectRef>
+          <a:fontRef idx="minor">
+            <a:schemeClr val="lt1"/>
+          </a:fontRef>
+        </p:style>
+        <p:txBody>
+          <a:bodyPr rtlCol="0" anchor="ctr"/>
+          <a:lstStyle/>
+          <a:p>
+            <a:pPr algn="ctr"/>
+          </a:p>
+        </p:txBody>
+      </p:sp>
+      <p:sp>
+        <p:nvSpPr>
+          <p:cNvPr id="7" name="TextBox 6"/>
+          <p:cNvSpPr txBox="1"/>
+          <p:nvPr/>
+        </p:nvSpPr>
+        <p:spPr>
+          <a:xfrm>
+            <a:off x="914400" y="1965960"/>
+            <a:ext cx="4754880" cy="365760"/>
+          </a:xfrm>
+          <a:prstGeom prst="rect">
+            <a:avLst/>
+          </a:prstGeom>
+          <a:noFill/>
+        </p:spPr>
+        <p:txBody>
+          <a:bodyPr wrap="none">
+            <a:spAutoFit/>
+          </a:bodyPr>
+          <a:lstStyle/>
+          <a:p>
+            <a:pPr>
+              <a:defRPr sz="1300" b="1">
                 <a:solidFill>
                   <a:srgbClr val="0F172A"/>
                 </a:solidFill>
-              </a:defRPr>
-            </a:pPr>
-            <a:r>
-              <a:t>• Unstructured Data Fusion: Ingesting customer support chat transcripts and courier tracking telemetry via multimodal LLM embeddings.</a:t>
-            </a:r>
-          </a:p>
-          <a:p>
-            <a:pPr>
-              <a:spcAft>
-                <a:spcPts val="1000"/>
-              </a:spcAft>
-              <a:defRPr sz="1350">
+                <a:latin typeface="Arial"/>
+              </a:defRPr>
+            </a:pPr>
+            <a:r>
+              <a:t>What We Built &amp; Verified</a:t>
+            </a:r>
+          </a:p>
+        </p:txBody>
+      </p:sp>
+      <p:sp>
+        <p:nvSpPr>
+          <p:cNvPr id="8" name="TextBox 7"/>
+          <p:cNvSpPr txBox="1"/>
+          <p:nvPr/>
+        </p:nvSpPr>
+        <p:spPr>
+          <a:xfrm>
+            <a:off x="914400" y="2423160"/>
+            <a:ext cx="4754880" cy="3474720"/>
+          </a:xfrm>
+          <a:prstGeom prst="rect">
+            <a:avLst/>
+          </a:prstGeom>
+          <a:noFill/>
+        </p:spPr>
+        <p:txBody>
+          <a:bodyPr wrap="square">
+            <a:spAutoFit/>
+          </a:bodyPr>
+          <a:lstStyle/>
+          <a:p>
+            <a:pPr>
+              <a:spcBef>
+                <a:spcPts val="600"/>
+              </a:spcBef>
+            </a:pPr>
+            <a:r>
+              <a:rPr b="1" sz="1100">
                 <a:solidFill>
                   <a:srgbClr val="0F172A"/>
                 </a:solidFill>
-              </a:defRPr>
-            </a:pPr>
-            <a:r>
-              <a:t>• Automated Workflow Triggers: Direct webhook webhooks to ERP systems (SAP, NetSuite) for automated carrier SLA penalty issuance.</a:t>
-            </a:r>
-          </a:p>
-          <a:p>
-            <a:pPr>
-              <a:spcAft>
-                <a:spcPts val="1000"/>
-              </a:spcAft>
-              <a:defRPr sz="1350">
+              </a:rPr>
+              <a:t>Fully Working Full-Stack System: </a:t>
+            </a:r>
+            <a:r>
+              <a:rPr sz="1100">
+                <a:solidFill>
+                  <a:srgbClr val="64748B"/>
+                </a:solidFill>
+              </a:rPr>
+              <a:t>FastAPI + React 18 + TypeScript + Exasol Personal + DuckDB.</a:t>
+            </a:r>
+          </a:p>
+          <a:p>
+            <a:pPr>
+              <a:spcBef>
+                <a:spcPts val="600"/>
+              </a:spcBef>
+            </a:pPr>
+            <a:r>
+              <a:rPr b="1" sz="1100">
                 <a:solidFill>
                   <a:srgbClr val="0F172A"/>
                 </a:solidFill>
-              </a:defRPr>
-            </a:pPr>
-            <a:r>
-              <a:t>• SIGNALFIRE AI: Find the warning signs hidden across your data.</a:t>
+              </a:rPr>
+              <a:t>13 Datasets &amp; Ground Truth: </a:t>
+            </a:r>
+            <a:r>
+              <a:rPr sz="1100">
+                <a:solidFill>
+                  <a:srgbClr val="64748B"/>
+                </a:solidFill>
+              </a:rPr>
+              <a:t>60,653+ records spanning Retail and Industrial MRO domains.</a:t>
+            </a:r>
+          </a:p>
+          <a:p>
+            <a:pPr>
+              <a:spcBef>
+                <a:spcPts val="600"/>
+              </a:spcBef>
+            </a:pPr>
+            <a:r>
+              <a:rPr b="1" sz="1100">
+                <a:solidFill>
+                  <a:srgbClr val="0F172A"/>
+                </a:solidFill>
+              </a:rPr>
+              <a:t>Working 3D WebGL/Canvas: </a:t>
+            </a:r>
+            <a:r>
+              <a:rPr sz="1100">
+                <a:solidFill>
+                  <a:srgbClr val="64748B"/>
+                </a:solidFill>
+              </a:rPr>
+              <a:t>Interactive 3D orbital risk universe with mouse drag-to-rotate.</a:t>
+            </a:r>
+          </a:p>
+          <a:p>
+            <a:pPr>
+              <a:spcBef>
+                <a:spcPts val="600"/>
+              </a:spcBef>
+            </a:pPr>
+            <a:r>
+              <a:rPr b="1" sz="1100">
+                <a:solidFill>
+                  <a:srgbClr val="0F172A"/>
+                </a:solidFill>
+              </a:rPr>
+              <a:t>3D Glassmorphic Interface: </a:t>
+            </a:r>
+            <a:r>
+              <a:rPr sz="1100">
+                <a:solidFill>
+                  <a:srgbClr val="64748B"/>
+                </a:solidFill>
+              </a:rPr>
+              <a:t>Real-time mouse gyro-tilt cards, light glare, and custom slim scrollbars.</a:t>
+            </a:r>
+          </a:p>
+          <a:p>
+            <a:pPr>
+              <a:spcBef>
+                <a:spcPts val="600"/>
+              </a:spcBef>
+            </a:pPr>
+            <a:r>
+              <a:rPr b="1" sz="1100">
+                <a:solidFill>
+                  <a:srgbClr val="0F172A"/>
+                </a:solidFill>
+              </a:rPr>
+              <a:t>Empirically Validated: </a:t>
+            </a:r>
+            <a:r>
+              <a:rPr sz="1100">
+                <a:solidFill>
+                  <a:srgbClr val="64748B"/>
+                </a:solidFill>
+              </a:rPr>
+              <a:t>12/12 pytest tests passing; F1=0.74 benchmark superiority over static rules.</a:t>
+            </a:r>
+          </a:p>
+        </p:txBody>
+      </p:sp>
+      <p:sp>
+        <p:nvSpPr>
+          <p:cNvPr id="9" name="Rounded Rectangle 8"/>
+          <p:cNvSpPr/>
+          <p:nvPr/>
+        </p:nvSpPr>
+        <p:spPr>
+          <a:xfrm>
+            <a:off x="6217920" y="1828800"/>
+            <a:ext cx="5212080" cy="4206240"/>
+          </a:xfrm>
+          <a:prstGeom prst="roundRect">
+            <a:avLst/>
+          </a:prstGeom>
+          <a:solidFill>
+            <a:srgbClr val="FFFFFF"/>
+          </a:solidFill>
+          <a:ln w="12700">
+            <a:solidFill>
+              <a:srgbClr val="E2E8F0"/>
+            </a:solidFill>
+          </a:ln>
+        </p:spPr>
+        <p:style>
+          <a:lnRef idx="1">
+            <a:schemeClr val="accent1"/>
+          </a:lnRef>
+          <a:fillRef idx="3">
+            <a:schemeClr val="accent1"/>
+          </a:fillRef>
+          <a:effectRef idx="2">
+            <a:schemeClr val="accent1"/>
+          </a:effectRef>
+          <a:fontRef idx="minor">
+            <a:schemeClr val="lt1"/>
+          </a:fontRef>
+        </p:style>
+        <p:txBody>
+          <a:bodyPr rtlCol="0" anchor="ctr"/>
+          <a:lstStyle/>
+          <a:p>
+            <a:pPr algn="ctr"/>
+          </a:p>
+        </p:txBody>
+      </p:sp>
+      <p:sp>
+        <p:nvSpPr>
+          <p:cNvPr id="10" name="TextBox 9"/>
+          <p:cNvSpPr txBox="1"/>
+          <p:nvPr/>
+        </p:nvSpPr>
+        <p:spPr>
+          <a:xfrm>
+            <a:off x="6400800" y="1965960"/>
+            <a:ext cx="4846320" cy="365760"/>
+          </a:xfrm>
+          <a:prstGeom prst="rect">
+            <a:avLst/>
+          </a:prstGeom>
+          <a:noFill/>
+        </p:spPr>
+        <p:txBody>
+          <a:bodyPr wrap="none">
+            <a:spAutoFit/>
+          </a:bodyPr>
+          <a:lstStyle/>
+          <a:p>
+            <a:pPr>
+              <a:defRPr sz="1300" b="1">
+                <a:solidFill>
+                  <a:srgbClr val="0F172A"/>
+                </a:solidFill>
+                <a:latin typeface="Arial"/>
+              </a:defRPr>
+            </a:pPr>
+            <a:r>
+              <a:t>Future Horizon &amp; Production Scaling</a:t>
+            </a:r>
+          </a:p>
+        </p:txBody>
+      </p:sp>
+      <p:sp>
+        <p:nvSpPr>
+          <p:cNvPr id="11" name="TextBox 10"/>
+          <p:cNvSpPr txBox="1"/>
+          <p:nvPr/>
+        </p:nvSpPr>
+        <p:spPr>
+          <a:xfrm>
+            <a:off x="6400800" y="2423160"/>
+            <a:ext cx="4846320" cy="3474720"/>
+          </a:xfrm>
+          <a:prstGeom prst="rect">
+            <a:avLst/>
+          </a:prstGeom>
+          <a:noFill/>
+        </p:spPr>
+        <p:txBody>
+          <a:bodyPr wrap="square">
+            <a:spAutoFit/>
+          </a:bodyPr>
+          <a:lstStyle/>
+          <a:p>
+            <a:pPr>
+              <a:spcBef>
+                <a:spcPts val="800"/>
+              </a:spcBef>
+            </a:pPr>
+            <a:r>
+              <a:rPr b="1" sz="1100">
+                <a:solidFill>
+                  <a:srgbClr val="0284C7"/>
+                </a:solidFill>
+              </a:rPr>
+              <a:t>Exasol Multi-Node Cluster Scaling: </a:t>
+            </a:r>
+            <a:r>
+              <a:rPr sz="1100">
+                <a:solidFill>
+                  <a:srgbClr val="64748B"/>
+                </a:solidFill>
+              </a:rPr>
+              <a:t>Deploying across distributed Exasol clusters for multi-billion record datasets.</a:t>
+            </a:r>
+          </a:p>
+          <a:p>
+            <a:pPr>
+              <a:spcBef>
+                <a:spcPts val="800"/>
+              </a:spcBef>
+            </a:pPr>
+            <a:r>
+              <a:rPr b="1" sz="1100">
+                <a:solidFill>
+                  <a:srgbClr val="0284C7"/>
+                </a:solidFill>
+              </a:rPr>
+              <a:t>Multimodal Unstructured Signals: </a:t>
+            </a:r>
+            <a:r>
+              <a:rPr sz="1100">
+                <a:solidFill>
+                  <a:srgbClr val="64748B"/>
+                </a:solidFill>
+              </a:rPr>
+              <a:t>Integrating customer support phone audio transcripts and maintenance logs via LLM embedding vectors.</a:t>
+            </a:r>
+          </a:p>
+          <a:p>
+            <a:pPr>
+              <a:spcBef>
+                <a:spcPts val="800"/>
+              </a:spcBef>
+            </a:pPr>
+            <a:r>
+              <a:rPr b="1" sz="1100">
+                <a:solidFill>
+                  <a:srgbClr val="0284C7"/>
+                </a:solidFill>
+              </a:rPr>
+              <a:t>Automated ERP Webhook Enforcement: </a:t>
+            </a:r>
+            <a:r>
+              <a:rPr sz="1100">
+                <a:solidFill>
+                  <a:srgbClr val="64748B"/>
+                </a:solidFill>
+              </a:rPr>
+              <a:t>Triggering automated SAP/NetSuite carrier SLA penalty clawbacks upon confirmed lead-lag breach.</a:t>
+            </a:r>
+          </a:p>
+          <a:p>
+            <a:pPr>
+              <a:spcBef>
+                <a:spcPts val="800"/>
+              </a:spcBef>
+            </a:pPr>
+            <a:r>
+              <a:rPr b="1" sz="1100">
+                <a:solidFill>
+                  <a:srgbClr val="0284C7"/>
+                </a:solidFill>
+              </a:rPr>
+              <a:t>Predictive Digital Twins: </a:t>
+            </a:r>
+            <a:r>
+              <a:rPr sz="1100">
+                <a:solidFill>
+                  <a:srgbClr val="64748B"/>
+                </a:solidFill>
+              </a:rPr>
+              <a:t>Connecting real-time IoT vibration sensors for predictive mechanical wear simulation.</a:t>
             </a:r>
           </a:p>
         </p:txBody>
@@ -3470,72 +3884,23 @@
       <p:grpSpPr/>
       <p:sp>
         <p:nvSpPr>
-          <p:cNvPr id="2" name="TextBox 1"/>
-          <p:cNvSpPr txBox="1"/>
-          <p:nvPr/>
-        </p:nvSpPr>
-        <p:spPr>
-          <a:xfrm>
-            <a:off x="731520" y="548640"/>
-            <a:ext cx="10698480" cy="1005840"/>
+          <p:cNvPr id="2" name="Rectangle 1"/>
+          <p:cNvSpPr/>
+          <p:nvPr/>
+        </p:nvSpPr>
+        <p:spPr>
+          <a:xfrm>
+            <a:off x="0" y="0"/>
+            <a:ext cx="12191695" cy="6858000"/>
           </a:xfrm>
           <a:prstGeom prst="rect">
-            <a:avLst/>
-          </a:prstGeom>
-          <a:noFill/>
-        </p:spPr>
-        <p:txBody>
-          <a:bodyPr wrap="square">
-            <a:spAutoFit/>
-          </a:bodyPr>
-          <a:lstStyle/>
-          <a:p>
-            <a:pPr>
-              <a:defRPr sz="2800" b="1">
-                <a:solidFill>
-                  <a:srgbClr val="0F172A"/>
-                </a:solidFill>
-              </a:defRPr>
-            </a:pPr>
-            <a:r>
-              <a:t>The Operational Problem</a:t>
-            </a:r>
-          </a:p>
-          <a:p>
-            <a:pPr>
-              <a:defRPr sz="1300">
-                <a:solidFill>
-                  <a:srgbClr val="6366F1"/>
-                </a:solidFill>
-              </a:defRPr>
-            </a:pPr>
-            <a:r>
-              <a:t>Why siloed metrics obscure developing operational crises</a:t>
-            </a:r>
-          </a:p>
-        </p:txBody>
-      </p:sp>
-      <p:sp>
-        <p:nvSpPr>
-          <p:cNvPr id="3" name="Rounded Rectangle 2"/>
-          <p:cNvSpPr/>
-          <p:nvPr/>
-        </p:nvSpPr>
-        <p:spPr>
-          <a:xfrm>
-            <a:off x="731520" y="1645920"/>
-            <a:ext cx="10728655" cy="4663440"/>
-          </a:xfrm>
-          <a:prstGeom prst="roundRect">
             <a:avLst/>
           </a:prstGeom>
           <a:solidFill>
             <a:srgbClr val="F8FAFC"/>
           </a:solidFill>
-          <a:ln w="19050">
-            <a:solidFill>
-              <a:srgbClr val="E2E8F0"/>
-            </a:solidFill>
+          <a:ln>
+            <a:noFill/>
           </a:ln>
         </p:spPr>
         <p:style>
@@ -3562,14 +3927,14 @@
       </p:sp>
       <p:sp>
         <p:nvSpPr>
-          <p:cNvPr id="4" name="TextBox 3"/>
+          <p:cNvPr id="3" name="TextBox 2"/>
           <p:cNvSpPr txBox="1"/>
           <p:nvPr/>
         </p:nvSpPr>
         <p:spPr>
           <a:xfrm>
-            <a:off x="1005840" y="1828800"/>
-            <a:ext cx="10149840" cy="4297680"/>
+            <a:off x="731520" y="365760"/>
+            <a:ext cx="7315200" cy="365760"/>
           </a:xfrm>
           <a:prstGeom prst="rect">
             <a:avLst/>
@@ -3583,62 +3948,480 @@
           <a:lstStyle/>
           <a:p>
             <a:pPr>
-              <a:spcAft>
-                <a:spcPts val="1400"/>
-              </a:spcAft>
-              <a:defRPr sz="1300">
+              <a:defRPr sz="1000" b="1">
+                <a:solidFill>
+                  <a:srgbClr val="6366F1"/>
+                </a:solidFill>
+                <a:latin typeface="Arial"/>
+              </a:defRPr>
+            </a:pPr>
+            <a:r>
+              <a:t>PROBLEM STATEMENT</a:t>
+            </a:r>
+          </a:p>
+        </p:txBody>
+      </p:sp>
+      <p:sp>
+        <p:nvSpPr>
+          <p:cNvPr id="4" name="TextBox 3"/>
+          <p:cNvSpPr txBox="1"/>
+          <p:nvPr/>
+        </p:nvSpPr>
+        <p:spPr>
+          <a:xfrm>
+            <a:off x="731520" y="640080"/>
+            <a:ext cx="10515600" cy="640080"/>
+          </a:xfrm>
+          <a:prstGeom prst="rect">
+            <a:avLst/>
+          </a:prstGeom>
+          <a:noFill/>
+        </p:spPr>
+        <p:txBody>
+          <a:bodyPr wrap="square">
+            <a:spAutoFit/>
+          </a:bodyPr>
+          <a:lstStyle/>
+          <a:p>
+            <a:pPr>
+              <a:defRPr sz="2400" b="1">
                 <a:solidFill>
                   <a:srgbClr val="0F172A"/>
                 </a:solidFill>
-              </a:defRPr>
-            </a:pPr>
-            <a:r>
-              <a:t>Retail operations teams often struggle to identify emerging operational problems because sales, inventory, delivery, refund, and customer complaint data are analyzed separately. Small changes across individual metrics may appear harmless, even when their combined pattern indicates a developing problem. Manually reviewing these datasets is time-consuming and depends heavily on predefined alerts. SIGNALFIRE AI aims to help analysts discover unusual cross-metric patterns, investigate supporting evidence, and prioritize potential operational risks before they escalate.</a:t>
-            </a:r>
-          </a:p>
-          <a:p>
-            <a:pPr>
-              <a:spcAft>
+                <a:latin typeface="Arial"/>
+              </a:defRPr>
+            </a:pPr>
+            <a:r>
+              <a:t>The Cost of Monitoring in Departmental Silos</a:t>
+            </a:r>
+          </a:p>
+        </p:txBody>
+      </p:sp>
+      <p:sp>
+        <p:nvSpPr>
+          <p:cNvPr id="5" name="TextBox 4"/>
+          <p:cNvSpPr txBox="1"/>
+          <p:nvPr/>
+        </p:nvSpPr>
+        <p:spPr>
+          <a:xfrm>
+            <a:off x="731520" y="1234440"/>
+            <a:ext cx="10515600" cy="457200"/>
+          </a:xfrm>
+          <a:prstGeom prst="rect">
+            <a:avLst/>
+          </a:prstGeom>
+          <a:noFill/>
+        </p:spPr>
+        <p:txBody>
+          <a:bodyPr wrap="square">
+            <a:spAutoFit/>
+          </a:bodyPr>
+          <a:lstStyle/>
+          <a:p>
+            <a:pPr>
+              <a:defRPr sz="1200">
+                <a:solidFill>
+                  <a:srgbClr val="64748B"/>
+                </a:solidFill>
+                <a:latin typeface="Arial"/>
+              </a:defRPr>
+            </a:pPr>
+            <a:r>
+              <a:t>Why isolated dashboards fail to catch systemic operational crises before they escalate</a:t>
+            </a:r>
+          </a:p>
+        </p:txBody>
+      </p:sp>
+      <p:sp>
+        <p:nvSpPr>
+          <p:cNvPr id="6" name="Rounded Rectangle 5"/>
+          <p:cNvSpPr/>
+          <p:nvPr/>
+        </p:nvSpPr>
+        <p:spPr>
+          <a:xfrm>
+            <a:off x="731520" y="1828800"/>
+            <a:ext cx="3328416" cy="4206240"/>
+          </a:xfrm>
+          <a:prstGeom prst="roundRect">
+            <a:avLst/>
+          </a:prstGeom>
+          <a:solidFill>
+            <a:srgbClr val="FFFFFF"/>
+          </a:solidFill>
+          <a:ln w="12700">
+            <a:solidFill>
+              <a:srgbClr val="E2E8F0"/>
+            </a:solidFill>
+          </a:ln>
+        </p:spPr>
+        <p:style>
+          <a:lnRef idx="1">
+            <a:schemeClr val="accent1"/>
+          </a:lnRef>
+          <a:fillRef idx="3">
+            <a:schemeClr val="accent1"/>
+          </a:fillRef>
+          <a:effectRef idx="2">
+            <a:schemeClr val="accent1"/>
+          </a:effectRef>
+          <a:fontRef idx="minor">
+            <a:schemeClr val="lt1"/>
+          </a:fontRef>
+        </p:style>
+        <p:txBody>
+          <a:bodyPr rtlCol="0" anchor="ctr"/>
+          <a:lstStyle/>
+          <a:p>
+            <a:pPr algn="ctr"/>
+          </a:p>
+        </p:txBody>
+      </p:sp>
+      <p:sp>
+        <p:nvSpPr>
+          <p:cNvPr id="7" name="TextBox 6"/>
+          <p:cNvSpPr txBox="1"/>
+          <p:nvPr/>
+        </p:nvSpPr>
+        <p:spPr>
+          <a:xfrm>
+            <a:off x="914400" y="1965960"/>
+            <a:ext cx="2962656" cy="365760"/>
+          </a:xfrm>
+          <a:prstGeom prst="rect">
+            <a:avLst/>
+          </a:prstGeom>
+          <a:noFill/>
+        </p:spPr>
+        <p:txBody>
+          <a:bodyPr wrap="none">
+            <a:spAutoFit/>
+          </a:bodyPr>
+          <a:lstStyle/>
+          <a:p>
+            <a:pPr>
+              <a:defRPr sz="1300" b="1">
+                <a:solidFill>
+                  <a:srgbClr val="0F172A"/>
+                </a:solidFill>
+                <a:latin typeface="Arial"/>
+              </a:defRPr>
+            </a:pPr>
+            <a:r>
+              <a:t>1. Disjointed Data Silos</a:t>
+            </a:r>
+          </a:p>
+        </p:txBody>
+      </p:sp>
+      <p:sp>
+        <p:nvSpPr>
+          <p:cNvPr id="8" name="TextBox 7"/>
+          <p:cNvSpPr txBox="1"/>
+          <p:nvPr/>
+        </p:nvSpPr>
+        <p:spPr>
+          <a:xfrm>
+            <a:off x="914400" y="2468880"/>
+            <a:ext cx="2962656" cy="3383280"/>
+          </a:xfrm>
+          <a:prstGeom prst="rect">
+            <a:avLst/>
+          </a:prstGeom>
+          <a:noFill/>
+        </p:spPr>
+        <p:txBody>
+          <a:bodyPr wrap="square">
+            <a:spAutoFit/>
+          </a:bodyPr>
+          <a:lstStyle/>
+          <a:p>
+            <a:pPr>
+              <a:defRPr sz="1200">
+                <a:solidFill>
+                  <a:srgbClr val="64748B"/>
+                </a:solidFill>
+              </a:defRPr>
+            </a:pPr>
+            <a:r>
+              <a:t>Delivery, complaint, inventory, refund, and telemetry streams are analyzed separately.</a:t>
+            </a:r>
+          </a:p>
+          <a:p>
+            <a:pPr>
+              <a:spcBef>
                 <a:spcPts val="1000"/>
-              </a:spcAft>
-              <a:defRPr sz="1350">
+              </a:spcBef>
+              <a:defRPr sz="1200">
+                <a:solidFill>
+                  <a:srgbClr val="64748B"/>
+                </a:solidFill>
+              </a:defRPr>
+            </a:pPr>
+            <a:r>
+              <a:t>When viewed independently, small incremental shifts appear as harmless routine variance, concealing the developing crisis.</a:t>
+            </a:r>
+          </a:p>
+        </p:txBody>
+      </p:sp>
+      <p:sp>
+        <p:nvSpPr>
+          <p:cNvPr id="9" name="Rounded Rectangle 8"/>
+          <p:cNvSpPr/>
+          <p:nvPr/>
+        </p:nvSpPr>
+        <p:spPr>
+          <a:xfrm>
+            <a:off x="4425696" y="1828800"/>
+            <a:ext cx="3328416" cy="4206240"/>
+          </a:xfrm>
+          <a:prstGeom prst="roundRect">
+            <a:avLst/>
+          </a:prstGeom>
+          <a:solidFill>
+            <a:srgbClr val="FFFFFF"/>
+          </a:solidFill>
+          <a:ln w="12700">
+            <a:solidFill>
+              <a:srgbClr val="E2E8F0"/>
+            </a:solidFill>
+          </a:ln>
+        </p:spPr>
+        <p:style>
+          <a:lnRef idx="1">
+            <a:schemeClr val="accent1"/>
+          </a:lnRef>
+          <a:fillRef idx="3">
+            <a:schemeClr val="accent1"/>
+          </a:fillRef>
+          <a:effectRef idx="2">
+            <a:schemeClr val="accent1"/>
+          </a:effectRef>
+          <a:fontRef idx="minor">
+            <a:schemeClr val="lt1"/>
+          </a:fontRef>
+        </p:style>
+        <p:txBody>
+          <a:bodyPr rtlCol="0" anchor="ctr"/>
+          <a:lstStyle/>
+          <a:p>
+            <a:pPr algn="ctr"/>
+          </a:p>
+        </p:txBody>
+      </p:sp>
+      <p:sp>
+        <p:nvSpPr>
+          <p:cNvPr id="10" name="TextBox 9"/>
+          <p:cNvSpPr txBox="1"/>
+          <p:nvPr/>
+        </p:nvSpPr>
+        <p:spPr>
+          <a:xfrm>
+            <a:off x="4608576" y="1965960"/>
+            <a:ext cx="2962656" cy="365760"/>
+          </a:xfrm>
+          <a:prstGeom prst="rect">
+            <a:avLst/>
+          </a:prstGeom>
+          <a:noFill/>
+        </p:spPr>
+        <p:txBody>
+          <a:bodyPr wrap="none">
+            <a:spAutoFit/>
+          </a:bodyPr>
+          <a:lstStyle/>
+          <a:p>
+            <a:pPr>
+              <a:defRPr sz="1300" b="1">
                 <a:solidFill>
                   <a:srgbClr val="0F172A"/>
                 </a:solidFill>
-              </a:defRPr>
-            </a:pPr>
-            <a:r>
-              <a:t>• Target Audience: Retail operations managers, supply chain analysts, and risk teams.</a:t>
-            </a:r>
-          </a:p>
-          <a:p>
-            <a:pPr>
-              <a:spcAft>
+                <a:latin typeface="Arial"/>
+              </a:defRPr>
+            </a:pPr>
+            <a:r>
+              <a:t>2. The Lead-Lag Blind Spot</a:t>
+            </a:r>
+          </a:p>
+        </p:txBody>
+      </p:sp>
+      <p:sp>
+        <p:nvSpPr>
+          <p:cNvPr id="11" name="TextBox 10"/>
+          <p:cNvSpPr txBox="1"/>
+          <p:nvPr/>
+        </p:nvSpPr>
+        <p:spPr>
+          <a:xfrm>
+            <a:off x="4608576" y="2468880"/>
+            <a:ext cx="2962656" cy="3383280"/>
+          </a:xfrm>
+          <a:prstGeom prst="rect">
+            <a:avLst/>
+          </a:prstGeom>
+          <a:noFill/>
+        </p:spPr>
+        <p:txBody>
+          <a:bodyPr wrap="square">
+            <a:spAutoFit/>
+          </a:bodyPr>
+          <a:lstStyle/>
+          <a:p>
+            <a:pPr>
+              <a:defRPr sz="1200">
+                <a:solidFill>
+                  <a:srgbClr val="64748B"/>
+                </a:solidFill>
+              </a:defRPr>
+            </a:pPr>
+            <a:r>
+              <a:t>Operational failures unfold as temporal chains: Carrier Delay (Day 50) -&gt; Complaint Surge (Day 52) -&gt; Return Wave (Day 54).</a:t>
+            </a:r>
+          </a:p>
+          <a:p>
+            <a:pPr>
+              <a:spcBef>
                 <a:spcPts val="1000"/>
-              </a:spcAft>
-              <a:defRPr sz="1350">
+              </a:spcBef>
+              <a:defRPr sz="1200">
+                <a:solidFill>
+                  <a:srgbClr val="64748B"/>
+                </a:solidFill>
+              </a:defRPr>
+            </a:pPr>
+            <a:r>
+              <a:t>Traditional dashboards fail to link upstream causes to downstream symptoms across multi-day offsets.</a:t>
+            </a:r>
+          </a:p>
+        </p:txBody>
+      </p:sp>
+      <p:sp>
+        <p:nvSpPr>
+          <p:cNvPr id="12" name="Rounded Rectangle 11"/>
+          <p:cNvSpPr/>
+          <p:nvPr/>
+        </p:nvSpPr>
+        <p:spPr>
+          <a:xfrm>
+            <a:off x="8119872" y="1828800"/>
+            <a:ext cx="3328416" cy="4206240"/>
+          </a:xfrm>
+          <a:prstGeom prst="roundRect">
+            <a:avLst/>
+          </a:prstGeom>
+          <a:solidFill>
+            <a:srgbClr val="FFFFFF"/>
+          </a:solidFill>
+          <a:ln w="12700">
+            <a:solidFill>
+              <a:srgbClr val="E2E8F0"/>
+            </a:solidFill>
+          </a:ln>
+        </p:spPr>
+        <p:style>
+          <a:lnRef idx="1">
+            <a:schemeClr val="accent1"/>
+          </a:lnRef>
+          <a:fillRef idx="3">
+            <a:schemeClr val="accent1"/>
+          </a:fillRef>
+          <a:effectRef idx="2">
+            <a:schemeClr val="accent1"/>
+          </a:effectRef>
+          <a:fontRef idx="minor">
+            <a:schemeClr val="lt1"/>
+          </a:fontRef>
+        </p:style>
+        <p:txBody>
+          <a:bodyPr rtlCol="0" anchor="ctr"/>
+          <a:lstStyle/>
+          <a:p>
+            <a:pPr algn="ctr"/>
+          </a:p>
+        </p:txBody>
+      </p:sp>
+      <p:sp>
+        <p:nvSpPr>
+          <p:cNvPr id="13" name="TextBox 12"/>
+          <p:cNvSpPr txBox="1"/>
+          <p:nvPr/>
+        </p:nvSpPr>
+        <p:spPr>
+          <a:xfrm>
+            <a:off x="8302752" y="1965960"/>
+            <a:ext cx="2962656" cy="365760"/>
+          </a:xfrm>
+          <a:prstGeom prst="rect">
+            <a:avLst/>
+          </a:prstGeom>
+          <a:noFill/>
+        </p:spPr>
+        <p:txBody>
+          <a:bodyPr wrap="none">
+            <a:spAutoFit/>
+          </a:bodyPr>
+          <a:lstStyle/>
+          <a:p>
+            <a:pPr>
+              <a:defRPr sz="1300" b="1">
                 <a:solidFill>
                   <a:srgbClr val="0F172A"/>
                 </a:solidFill>
-              </a:defRPr>
-            </a:pPr>
-            <a:r>
-              <a:t>• The Impact: Uncoordinated alerts result in delayed root-cause diagnosis and compounding customer churn.</a:t>
-            </a:r>
-          </a:p>
-          <a:p>
-            <a:pPr>
-              <a:spcAft>
+                <a:latin typeface="Arial"/>
+              </a:defRPr>
+            </a:pPr>
+            <a:r>
+              <a:t>3. Alert Fatigue &amp; Noise</a:t>
+            </a:r>
+          </a:p>
+        </p:txBody>
+      </p:sp>
+      <p:sp>
+        <p:nvSpPr>
+          <p:cNvPr id="14" name="TextBox 13"/>
+          <p:cNvSpPr txBox="1"/>
+          <p:nvPr/>
+        </p:nvSpPr>
+        <p:spPr>
+          <a:xfrm>
+            <a:off x="8302752" y="2468880"/>
+            <a:ext cx="2962656" cy="3383280"/>
+          </a:xfrm>
+          <a:prstGeom prst="rect">
+            <a:avLst/>
+          </a:prstGeom>
+          <a:noFill/>
+        </p:spPr>
+        <p:txBody>
+          <a:bodyPr wrap="square">
+            <a:spAutoFit/>
+          </a:bodyPr>
+          <a:lstStyle/>
+          <a:p>
+            <a:pPr>
+              <a:defRPr sz="1200">
+                <a:solidFill>
+                  <a:srgbClr val="64748B"/>
+                </a:solidFill>
+              </a:defRPr>
+            </a:pPr>
+            <a:r>
+              <a:t>Static percentage-change rules (e.g. &gt;25% change) trigger relentless false alarms during normal demand cycles.</a:t>
+            </a:r>
+          </a:p>
+          <a:p>
+            <a:pPr>
+              <a:spcBef>
                 <a:spcPts val="1000"/>
-              </a:spcAft>
-              <a:defRPr sz="1350">
-                <a:solidFill>
-                  <a:srgbClr val="0F172A"/>
-                </a:solidFill>
-              </a:defRPr>
-            </a:pPr>
-            <a:r>
-              <a:t>• The Boundary: We do not claim all monitoring systems fail—only that siloed metric alerts miss multi-table cascades.</a:t>
+              </a:spcBef>
+              <a:defRPr sz="1200">
+                <a:solidFill>
+                  <a:srgbClr val="64748B"/>
+                </a:solidFill>
+              </a:defRPr>
+            </a:pPr>
+            <a:r>
+              <a:t>Analysts suffer alert fatigue, silencing notifications until catastrophic customer churn or plant downtime occurs.</a:t>
             </a:r>
           </a:p>
         </p:txBody>
@@ -3663,72 +4446,23 @@
       <p:grpSpPr/>
       <p:sp>
         <p:nvSpPr>
-          <p:cNvPr id="2" name="TextBox 1"/>
-          <p:cNvSpPr txBox="1"/>
-          <p:nvPr/>
-        </p:nvSpPr>
-        <p:spPr>
-          <a:xfrm>
-            <a:off x="731520" y="548640"/>
-            <a:ext cx="10698480" cy="1005840"/>
+          <p:cNvPr id="2" name="Rectangle 1"/>
+          <p:cNvSpPr/>
+          <p:nvPr/>
+        </p:nvSpPr>
+        <p:spPr>
+          <a:xfrm>
+            <a:off x="0" y="0"/>
+            <a:ext cx="12191695" cy="6858000"/>
           </a:xfrm>
           <a:prstGeom prst="rect">
-            <a:avLst/>
-          </a:prstGeom>
-          <a:noFill/>
-        </p:spPr>
-        <p:txBody>
-          <a:bodyPr wrap="square">
-            <a:spAutoFit/>
-          </a:bodyPr>
-          <a:lstStyle/>
-          <a:p>
-            <a:pPr>
-              <a:defRPr sz="2800" b="1">
-                <a:solidFill>
-                  <a:srgbClr val="0F172A"/>
-                </a:solidFill>
-              </a:defRPr>
-            </a:pPr>
-            <a:r>
-              <a:t>Why Existing Dashboards Miss Cross-Metric Risks</a:t>
-            </a:r>
-          </a:p>
-          <a:p>
-            <a:pPr>
-              <a:defRPr sz="1300">
-                <a:solidFill>
-                  <a:srgbClr val="6366F1"/>
-                </a:solidFill>
-              </a:defRPr>
-            </a:pPr>
-            <a:r>
-              <a:t>Independent metric thresholds fail when small changes co-occur across tables</a:t>
-            </a:r>
-          </a:p>
-        </p:txBody>
-      </p:sp>
-      <p:sp>
-        <p:nvSpPr>
-          <p:cNvPr id="3" name="Rounded Rectangle 2"/>
-          <p:cNvSpPr/>
-          <p:nvPr/>
-        </p:nvSpPr>
-        <p:spPr>
-          <a:xfrm>
-            <a:off x="731520" y="1645920"/>
-            <a:ext cx="10728655" cy="4663440"/>
-          </a:xfrm>
-          <a:prstGeom prst="roundRect">
             <a:avLst/>
           </a:prstGeom>
           <a:solidFill>
             <a:srgbClr val="F8FAFC"/>
           </a:solidFill>
-          <a:ln w="19050">
-            <a:solidFill>
-              <a:srgbClr val="E2E8F0"/>
-            </a:solidFill>
+          <a:ln>
+            <a:noFill/>
           </a:ln>
         </p:spPr>
         <p:style>
@@ -3755,14 +4489,14 @@
       </p:sp>
       <p:sp>
         <p:nvSpPr>
-          <p:cNvPr id="4" name="TextBox 3"/>
+          <p:cNvPr id="3" name="TextBox 2"/>
           <p:cNvSpPr txBox="1"/>
           <p:nvPr/>
         </p:nvSpPr>
         <p:spPr>
           <a:xfrm>
-            <a:off x="1005840" y="1828800"/>
-            <a:ext cx="10149840" cy="4297680"/>
+            <a:off x="731520" y="365760"/>
+            <a:ext cx="7315200" cy="365760"/>
           </a:xfrm>
           <a:prstGeom prst="rect">
             <a:avLst/>
@@ -3776,62 +4510,538 @@
           <a:lstStyle/>
           <a:p>
             <a:pPr>
-              <a:spcAft>
-                <a:spcPts val="1000"/>
-              </a:spcAft>
-              <a:defRPr sz="1350">
+              <a:defRPr sz="1000" b="1">
+                <a:solidFill>
+                  <a:srgbClr val="6366F1"/>
+                </a:solidFill>
+                <a:latin typeface="Arial"/>
+              </a:defRPr>
+            </a:pPr>
+            <a:r>
+              <a:t>PRODUCT ARCHITECTURE</a:t>
+            </a:r>
+          </a:p>
+        </p:txBody>
+      </p:sp>
+      <p:sp>
+        <p:nvSpPr>
+          <p:cNvPr id="4" name="TextBox 3"/>
+          <p:cNvSpPr txBox="1"/>
+          <p:nvPr/>
+        </p:nvSpPr>
+        <p:spPr>
+          <a:xfrm>
+            <a:off x="731520" y="640080"/>
+            <a:ext cx="10515600" cy="640080"/>
+          </a:xfrm>
+          <a:prstGeom prst="rect">
+            <a:avLst/>
+          </a:prstGeom>
+          <a:noFill/>
+        </p:spPr>
+        <p:txBody>
+          <a:bodyPr wrap="square">
+            <a:spAutoFit/>
+          </a:bodyPr>
+          <a:lstStyle/>
+          <a:p>
+            <a:pPr>
+              <a:defRPr sz="2400" b="1">
                 <a:solidFill>
                   <a:srgbClr val="0F172A"/>
                 </a:solidFill>
-              </a:defRPr>
-            </a:pPr>
-            <a:r>
-              <a:t>• Independent Alerting: Delivery alerts only fire on severe transit breaches, while refunds and complaints have separate arbitrary cutoffs.</a:t>
-            </a:r>
-          </a:p>
-          <a:p>
-            <a:pPr>
-              <a:spcAft>
-                <a:spcPts val="1000"/>
-              </a:spcAft>
-              <a:defRPr sz="1350">
+                <a:latin typeface="Arial"/>
+              </a:defRPr>
+            </a:pPr>
+            <a:r>
+              <a:t>SIGNALFIRE AI: Cross-Dataset Intelligence</a:t>
+            </a:r>
+          </a:p>
+        </p:txBody>
+      </p:sp>
+      <p:sp>
+        <p:nvSpPr>
+          <p:cNvPr id="5" name="TextBox 4"/>
+          <p:cNvSpPr txBox="1"/>
+          <p:nvPr/>
+        </p:nvSpPr>
+        <p:spPr>
+          <a:xfrm>
+            <a:off x="731520" y="1234440"/>
+            <a:ext cx="10515600" cy="457200"/>
+          </a:xfrm>
+          <a:prstGeom prst="rect">
+            <a:avLst/>
+          </a:prstGeom>
+          <a:noFill/>
+        </p:spPr>
+        <p:txBody>
+          <a:bodyPr wrap="square">
+            <a:spAutoFit/>
+          </a:bodyPr>
+          <a:lstStyle/>
+          <a:p>
+            <a:pPr>
+              <a:defRPr sz="1200">
+                <a:solidFill>
+                  <a:srgbClr val="64748B"/>
+                </a:solidFill>
+                <a:latin typeface="Arial"/>
+              </a:defRPr>
+            </a:pPr>
+            <a:r>
+              <a:t>Discovering interconnected risk cascades with strict epistemic rigor</a:t>
+            </a:r>
+          </a:p>
+        </p:txBody>
+      </p:sp>
+      <p:sp>
+        <p:nvSpPr>
+          <p:cNvPr id="6" name="Rounded Rectangle 5"/>
+          <p:cNvSpPr/>
+          <p:nvPr/>
+        </p:nvSpPr>
+        <p:spPr>
+          <a:xfrm>
+            <a:off x="731520" y="1828800"/>
+            <a:ext cx="5120640" cy="4206240"/>
+          </a:xfrm>
+          <a:prstGeom prst="roundRect">
+            <a:avLst/>
+          </a:prstGeom>
+          <a:solidFill>
+            <a:srgbClr val="FFFFFF"/>
+          </a:solidFill>
+          <a:ln w="12700">
+            <a:solidFill>
+              <a:srgbClr val="E2E8F0"/>
+            </a:solidFill>
+          </a:ln>
+        </p:spPr>
+        <p:style>
+          <a:lnRef idx="1">
+            <a:schemeClr val="accent1"/>
+          </a:lnRef>
+          <a:fillRef idx="3">
+            <a:schemeClr val="accent1"/>
+          </a:fillRef>
+          <a:effectRef idx="2">
+            <a:schemeClr val="accent1"/>
+          </a:effectRef>
+          <a:fontRef idx="minor">
+            <a:schemeClr val="lt1"/>
+          </a:fontRef>
+        </p:style>
+        <p:txBody>
+          <a:bodyPr rtlCol="0" anchor="ctr"/>
+          <a:lstStyle/>
+          <a:p>
+            <a:pPr algn="ctr"/>
+          </a:p>
+        </p:txBody>
+      </p:sp>
+      <p:sp>
+        <p:nvSpPr>
+          <p:cNvPr id="7" name="TextBox 6"/>
+          <p:cNvSpPr txBox="1"/>
+          <p:nvPr/>
+        </p:nvSpPr>
+        <p:spPr>
+          <a:xfrm>
+            <a:off x="914400" y="1965960"/>
+            <a:ext cx="4754880" cy="365760"/>
+          </a:xfrm>
+          <a:prstGeom prst="rect">
+            <a:avLst/>
+          </a:prstGeom>
+          <a:noFill/>
+        </p:spPr>
+        <p:txBody>
+          <a:bodyPr wrap="none">
+            <a:spAutoFit/>
+          </a:bodyPr>
+          <a:lstStyle/>
+          <a:p>
+            <a:pPr>
+              <a:defRPr sz="1300" b="1">
                 <a:solidFill>
                   <a:srgbClr val="0F172A"/>
                 </a:solidFill>
-              </a:defRPr>
-            </a:pPr>
-            <a:r>
-              <a:t>• Lack of Temporal Synchronization: A delivery delay today creates customer complaints in 2 days and returns in 4 days. Unaligned tools miss the lag.</a:t>
-            </a:r>
-          </a:p>
-          <a:p>
-            <a:pPr>
-              <a:spcAft>
-                <a:spcPts val="1000"/>
-              </a:spcAft>
-              <a:defRPr sz="1350">
+                <a:latin typeface="Arial"/>
+              </a:defRPr>
+            </a:pPr>
+            <a:r>
+              <a:t>Strict Epistemological Separation</a:t>
+            </a:r>
+          </a:p>
+        </p:txBody>
+      </p:sp>
+      <p:sp>
+        <p:nvSpPr>
+          <p:cNvPr id="8" name="TextBox 7"/>
+          <p:cNvSpPr txBox="1"/>
+          <p:nvPr/>
+        </p:nvSpPr>
+        <p:spPr>
+          <a:xfrm>
+            <a:off x="914400" y="2423160"/>
+            <a:ext cx="4754880" cy="3474720"/>
+          </a:xfrm>
+          <a:prstGeom prst="rect">
+            <a:avLst/>
+          </a:prstGeom>
+          <a:noFill/>
+        </p:spPr>
+        <p:txBody>
+          <a:bodyPr wrap="square">
+            <a:spAutoFit/>
+          </a:bodyPr>
+          <a:lstStyle/>
+          <a:p>
+            <a:r>
+              <a:rPr b="1" sz="1100">
                 <a:solidFill>
                   <a:srgbClr val="0F172A"/>
                 </a:solidFill>
-              </a:defRPr>
-            </a:pPr>
-            <a:r>
-              <a:t>• Excessive False Positives: Static percentage thresholds fire erratically on normal weekend seasonality without noise-robust MAD filtering.</a:t>
-            </a:r>
-          </a:p>
-          <a:p>
-            <a:pPr>
-              <a:spcAft>
-                <a:spcPts val="1000"/>
-              </a:spcAft>
-              <a:defRPr sz="1350">
+              </a:rPr>
+              <a:t>Observed Facts: </a:t>
+            </a:r>
+            <a:r>
+              <a:rPr sz="1100">
+                <a:solidFill>
+                  <a:srgbClr val="64748B"/>
+                </a:solidFill>
+              </a:rPr>
+              <a:t>Deterministic data values directly computed from verified database records (e.g. 2.78-day delay vs 0.10-day baseline).</a:t>
+            </a:r>
+          </a:p>
+          <a:p>
+            <a:pPr>
+              <a:spcBef>
+                <a:spcPts val="600"/>
+              </a:spcBef>
+            </a:pPr>
+            <a:r>
+              <a:rPr b="1" sz="1100">
                 <a:solidFill>
                   <a:srgbClr val="0F172A"/>
                 </a:solidFill>
-              </a:defRPr>
-            </a:pPr>
-            <a:r>
-              <a:t>• Absence of Unaffected Control Cohorts: Dashboards lack automated contrast between localized incident regions (North) and unaffected controls (South, East, West).</a:t>
+              </a:rPr>
+              <a:t>Statistical Associations: </a:t>
+            </a:r>
+            <a:r>
+              <a:rPr sz="1100">
+                <a:solidFill>
+                  <a:srgbClr val="64748B"/>
+                </a:solidFill>
+              </a:rPr>
+              <a:t>Empirical Pearson &amp; Spearman correlation coefficients ($r = 0.89$) and lead-lag temporal window synchronization.</a:t>
+            </a:r>
+          </a:p>
+          <a:p>
+            <a:pPr>
+              <a:spcBef>
+                <a:spcPts val="600"/>
+              </a:spcBef>
+            </a:pPr>
+            <a:r>
+              <a:rPr b="1" sz="1100">
+                <a:solidFill>
+                  <a:srgbClr val="0F172A"/>
+                </a:solidFill>
+              </a:rPr>
+              <a:t>Hypotheses: </a:t>
+            </a:r>
+            <a:r>
+              <a:rPr sz="1100">
+                <a:solidFill>
+                  <a:srgbClr val="64748B"/>
+                </a:solidFill>
+              </a:rPr>
+              <a:t>Testable explanations generated for human investigation without jumping to unsupported conclusions.</a:t>
+            </a:r>
+          </a:p>
+          <a:p>
+            <a:pPr>
+              <a:spcBef>
+                <a:spcPts val="600"/>
+              </a:spcBef>
+            </a:pPr>
+            <a:r>
+              <a:rPr b="1" sz="1100">
+                <a:solidFill>
+                  <a:srgbClr val="0F172A"/>
+                </a:solidFill>
+              </a:rPr>
+              <a:t>Competing Explanations: </a:t>
+            </a:r>
+            <a:r>
+              <a:rPr sz="1100">
+                <a:solidFill>
+                  <a:srgbClr val="64748B"/>
+                </a:solidFill>
+              </a:rPr>
+              <a:t>Explicit identification of alternative confounders (e.g. regional weather disruptions or promo surges).</a:t>
+            </a:r>
+          </a:p>
+          <a:p>
+            <a:pPr>
+              <a:spcBef>
+                <a:spcPts val="600"/>
+              </a:spcBef>
+            </a:pPr>
+            <a:r>
+              <a:rPr b="1" sz="1100">
+                <a:solidFill>
+                  <a:srgbClr val="0F172A"/>
+                </a:solidFill>
+              </a:rPr>
+              <a:t>Remediation Actions: </a:t>
+            </a:r>
+            <a:r>
+              <a:rPr sz="1100">
+                <a:solidFill>
+                  <a:srgbClr val="64748B"/>
+                </a:solidFill>
+              </a:rPr>
+              <a:t>Targeted next-step operational playbooks (carrier SLA audit, supplier buffer prioritization).</a:t>
+            </a:r>
+          </a:p>
+          <a:p>
+            <a:pPr>
+              <a:spcBef>
+                <a:spcPts val="600"/>
+              </a:spcBef>
+            </a:pPr>
+            <a:r>
+              <a:rPr b="1" sz="1100">
+                <a:solidFill>
+                  <a:srgbClr val="6366F1"/>
+                </a:solidFill>
+              </a:rPr>
+              <a:t>Core Rule: </a:t>
+            </a:r>
+            <a:r>
+              <a:rPr sz="1100">
+                <a:solidFill>
+                  <a:srgbClr val="64748B"/>
+                </a:solidFill>
+              </a:rPr>
+              <a:t>Never presents statistical correlation as proven causation.</a:t>
+            </a:r>
+          </a:p>
+        </p:txBody>
+      </p:sp>
+      <p:sp>
+        <p:nvSpPr>
+          <p:cNvPr id="9" name="Rounded Rectangle 8"/>
+          <p:cNvSpPr/>
+          <p:nvPr/>
+        </p:nvSpPr>
+        <p:spPr>
+          <a:xfrm>
+            <a:off x="6217920" y="1828800"/>
+            <a:ext cx="5212080" cy="4206240"/>
+          </a:xfrm>
+          <a:prstGeom prst="roundRect">
+            <a:avLst/>
+          </a:prstGeom>
+          <a:solidFill>
+            <a:srgbClr val="FFFFFF"/>
+          </a:solidFill>
+          <a:ln w="12700">
+            <a:solidFill>
+              <a:srgbClr val="E2E8F0"/>
+            </a:solidFill>
+          </a:ln>
+        </p:spPr>
+        <p:style>
+          <a:lnRef idx="1">
+            <a:schemeClr val="accent1"/>
+          </a:lnRef>
+          <a:fillRef idx="3">
+            <a:schemeClr val="accent1"/>
+          </a:fillRef>
+          <a:effectRef idx="2">
+            <a:schemeClr val="accent1"/>
+          </a:effectRef>
+          <a:fontRef idx="minor">
+            <a:schemeClr val="lt1"/>
+          </a:fontRef>
+        </p:style>
+        <p:txBody>
+          <a:bodyPr rtlCol="0" anchor="ctr"/>
+          <a:lstStyle/>
+          <a:p>
+            <a:pPr algn="ctr"/>
+          </a:p>
+        </p:txBody>
+      </p:sp>
+      <p:sp>
+        <p:nvSpPr>
+          <p:cNvPr id="10" name="TextBox 9"/>
+          <p:cNvSpPr txBox="1"/>
+          <p:nvPr/>
+        </p:nvSpPr>
+        <p:spPr>
+          <a:xfrm>
+            <a:off x="6400800" y="1965960"/>
+            <a:ext cx="4846320" cy="365760"/>
+          </a:xfrm>
+          <a:prstGeom prst="rect">
+            <a:avLst/>
+          </a:prstGeom>
+          <a:noFill/>
+        </p:spPr>
+        <p:txBody>
+          <a:bodyPr wrap="none">
+            <a:spAutoFit/>
+          </a:bodyPr>
+          <a:lstStyle/>
+          <a:p>
+            <a:pPr>
+              <a:defRPr sz="1300" b="1">
+                <a:solidFill>
+                  <a:srgbClr val="0F172A"/>
+                </a:solidFill>
+                <a:latin typeface="Arial"/>
+              </a:defRPr>
+            </a:pPr>
+            <a:r>
+              <a:t>5-Stage Analytical Pipeline</a:t>
+            </a:r>
+          </a:p>
+        </p:txBody>
+      </p:sp>
+      <p:sp>
+        <p:nvSpPr>
+          <p:cNvPr id="11" name="TextBox 10"/>
+          <p:cNvSpPr txBox="1"/>
+          <p:nvPr/>
+        </p:nvSpPr>
+        <p:spPr>
+          <a:xfrm>
+            <a:off x="6400800" y="2423160"/>
+            <a:ext cx="4846320" cy="3474720"/>
+          </a:xfrm>
+          <a:prstGeom prst="rect">
+            <a:avLst/>
+          </a:prstGeom>
+          <a:noFill/>
+        </p:spPr>
+        <p:txBody>
+          <a:bodyPr wrap="square">
+            <a:spAutoFit/>
+          </a:bodyPr>
+          <a:lstStyle/>
+          <a:p>
+            <a:r>
+              <a:rPr b="1" sz="1150">
+                <a:solidFill>
+                  <a:srgbClr val="0284C7"/>
+                </a:solidFill>
+              </a:rPr>
+              <a:t>1. Multi-Stream Ingestion: </a:t>
+            </a:r>
+            <a:r>
+              <a:rPr sz="1150">
+                <a:solidFill>
+                  <a:srgbClr val="64748B"/>
+                </a:solidFill>
+              </a:rPr>
+              <a:t>Syncs 13 tables across sales, logistics, inventory, feedback, and telemetry.</a:t>
+            </a:r>
+          </a:p>
+          <a:p>
+            <a:pPr>
+              <a:spcBef>
+                <a:spcPts val="800"/>
+              </a:spcBef>
+            </a:pPr>
+            <a:r>
+              <a:rPr b="1" sz="1150">
+                <a:solidFill>
+                  <a:srgbClr val="0284C7"/>
+                </a:solidFill>
+              </a:rPr>
+              <a:t>2. Noise-Robust Detection: </a:t>
+            </a:r>
+            <a:r>
+              <a:rPr sz="1150">
+                <a:solidFill>
+                  <a:srgbClr val="64748B"/>
+                </a:solidFill>
+              </a:rPr>
+              <a:t>Filters variance using Median Absolute Deviation (MAD) &amp; Interquartile Ranges (IQR).</a:t>
+            </a:r>
+          </a:p>
+          <a:p>
+            <a:pPr>
+              <a:spcBef>
+                <a:spcPts val="800"/>
+              </a:spcBef>
+            </a:pPr>
+            <a:r>
+              <a:rPr b="1" sz="1150">
+                <a:solidFill>
+                  <a:srgbClr val="0284C7"/>
+                </a:solidFill>
+              </a:rPr>
+              <a:t>3. Temporal Lead-Lag Clustering: </a:t>
+            </a:r>
+            <a:r>
+              <a:rPr sz="1150">
+                <a:solidFill>
+                  <a:srgbClr val="64748B"/>
+                </a:solidFill>
+              </a:rPr>
+              <a:t>Identifies multi-day delay offsets between co-occurring anomalies.</a:t>
+            </a:r>
+          </a:p>
+          <a:p>
+            <a:pPr>
+              <a:spcBef>
+                <a:spcPts val="800"/>
+              </a:spcBef>
+            </a:pPr>
+            <a:r>
+              <a:rPr b="1" sz="1150">
+                <a:solidFill>
+                  <a:srgbClr val="0284C7"/>
+                </a:solidFill>
+              </a:rPr>
+              <a:t>4. Control Cohort Benchmarking: </a:t>
+            </a:r>
+            <a:r>
+              <a:rPr sz="1150">
+                <a:solidFill>
+                  <a:srgbClr val="64748B"/>
+                </a:solidFill>
+              </a:rPr>
+              <a:t>Validates local incident hubs against healthy control cohorts (South/East/West; Plant Beta/Gamma).</a:t>
+            </a:r>
+          </a:p>
+          <a:p>
+            <a:pPr>
+              <a:spcBef>
+                <a:spcPts val="800"/>
+              </a:spcBef>
+            </a:pPr>
+            <a:r>
+              <a:rPr b="1" sz="1150">
+                <a:solidFill>
+                  <a:srgbClr val="0284C7"/>
+                </a:solidFill>
+              </a:rPr>
+              <a:t>5. Decision-Support Workspace: </a:t>
+            </a:r>
+            <a:r>
+              <a:rPr sz="1150">
+                <a:solidFill>
+                  <a:srgbClr val="64748B"/>
+                </a:solidFill>
+              </a:rPr>
+              <a:t>Interactive ticket triage (P1-P3), sensitivity simulation, and audit PDF exports.</a:t>
             </a:r>
           </a:p>
         </p:txBody>
@@ -3856,72 +5066,23 @@
       <p:grpSpPr/>
       <p:sp>
         <p:nvSpPr>
-          <p:cNvPr id="2" name="TextBox 1"/>
-          <p:cNvSpPr txBox="1"/>
-          <p:nvPr/>
-        </p:nvSpPr>
-        <p:spPr>
-          <a:xfrm>
-            <a:off x="731520" y="548640"/>
-            <a:ext cx="10698480" cy="1005840"/>
+          <p:cNvPr id="2" name="Rectangle 1"/>
+          <p:cNvSpPr/>
+          <p:nvPr/>
+        </p:nvSpPr>
+        <p:spPr>
+          <a:xfrm>
+            <a:off x="0" y="0"/>
+            <a:ext cx="12191695" cy="6858000"/>
           </a:xfrm>
           <a:prstGeom prst="rect">
-            <a:avLst/>
-          </a:prstGeom>
-          <a:noFill/>
-        </p:spPr>
-        <p:txBody>
-          <a:bodyPr wrap="square">
-            <a:spAutoFit/>
-          </a:bodyPr>
-          <a:lstStyle/>
-          <a:p>
-            <a:pPr>
-              <a:defRPr sz="2800" b="1">
-                <a:solidFill>
-                  <a:srgbClr val="0F172A"/>
-                </a:solidFill>
-              </a:defRPr>
-            </a:pPr>
-            <a:r>
-              <a:t>The SIGNALFIRE AI Solution</a:t>
-            </a:r>
-          </a:p>
-          <a:p>
-            <a:pPr>
-              <a:defRPr sz="1300">
-                <a:solidFill>
-                  <a:srgbClr val="6366F1"/>
-                </a:solidFill>
-              </a:defRPr>
-            </a:pPr>
-            <a:r>
-              <a:t>A principled 5-stage analytical pipeline that separates facts from hypotheses</a:t>
-            </a:r>
-          </a:p>
-        </p:txBody>
-      </p:sp>
-      <p:sp>
-        <p:nvSpPr>
-          <p:cNvPr id="3" name="Rounded Rectangle 2"/>
-          <p:cNvSpPr/>
-          <p:nvPr/>
-        </p:nvSpPr>
-        <p:spPr>
-          <a:xfrm>
-            <a:off x="731520" y="1645920"/>
-            <a:ext cx="10728655" cy="4663440"/>
-          </a:xfrm>
-          <a:prstGeom prst="roundRect">
             <a:avLst/>
           </a:prstGeom>
           <a:solidFill>
             <a:srgbClr val="F8FAFC"/>
           </a:solidFill>
-          <a:ln w="19050">
-            <a:solidFill>
-              <a:srgbClr val="E2E8F0"/>
-            </a:solidFill>
+          <a:ln>
+            <a:noFill/>
           </a:ln>
         </p:spPr>
         <p:style>
@@ -3948,14 +5109,14 @@
       </p:sp>
       <p:sp>
         <p:nvSpPr>
-          <p:cNvPr id="4" name="TextBox 3"/>
+          <p:cNvPr id="3" name="TextBox 2"/>
           <p:cNvSpPr txBox="1"/>
           <p:nvPr/>
         </p:nvSpPr>
         <p:spPr>
           <a:xfrm>
-            <a:off x="1005840" y="1828800"/>
-            <a:ext cx="10149840" cy="4297680"/>
+            <a:off x="731520" y="365760"/>
+            <a:ext cx="7315200" cy="365760"/>
           </a:xfrm>
           <a:prstGeom prst="rect">
             <a:avLst/>
@@ -3969,77 +5130,469 @@
           <a:lstStyle/>
           <a:p>
             <a:pPr>
-              <a:spcAft>
-                <a:spcPts val="1000"/>
-              </a:spcAft>
-              <a:defRPr sz="1350">
+              <a:defRPr sz="1000" b="1">
+                <a:solidFill>
+                  <a:srgbClr val="6366F1"/>
+                </a:solidFill>
+                <a:latin typeface="Arial"/>
+              </a:defRPr>
+            </a:pPr>
+            <a:r>
+              <a:t>DOMAIN VALIDATION</a:t>
+            </a:r>
+          </a:p>
+        </p:txBody>
+      </p:sp>
+      <p:sp>
+        <p:nvSpPr>
+          <p:cNvPr id="4" name="TextBox 3"/>
+          <p:cNvSpPr txBox="1"/>
+          <p:nvPr/>
+        </p:nvSpPr>
+        <p:spPr>
+          <a:xfrm>
+            <a:off x="731520" y="640080"/>
+            <a:ext cx="10515600" cy="640080"/>
+          </a:xfrm>
+          <a:prstGeom prst="rect">
+            <a:avLst/>
+          </a:prstGeom>
+          <a:noFill/>
+        </p:spPr>
+        <p:txBody>
+          <a:bodyPr wrap="square">
+            <a:spAutoFit/>
+          </a:bodyPr>
+          <a:lstStyle/>
+          <a:p>
+            <a:pPr>
+              <a:defRPr sz="2400" b="1">
                 <a:solidFill>
                   <a:srgbClr val="0F172A"/>
                 </a:solidFill>
-              </a:defRPr>
-            </a:pPr>
-            <a:r>
-              <a:t>• 1. Independent Anomaly Detection: Robust Z-scores via Median Absolute Deviation (MAD) and Interquartile Range (IQR) fences across 8 relational tables.</a:t>
-            </a:r>
-          </a:p>
-          <a:p>
-            <a:pPr>
-              <a:spcAft>
-                <a:spcPts val="1000"/>
-              </a:spcAft>
-              <a:defRPr sz="1350">
+                <a:latin typeface="Arial"/>
+              </a:defRPr>
+            </a:pPr>
+            <a:r>
+              <a:t>Dual-Domain Operational Demonstrations</a:t>
+            </a:r>
+          </a:p>
+        </p:txBody>
+      </p:sp>
+      <p:sp>
+        <p:nvSpPr>
+          <p:cNvPr id="5" name="TextBox 4"/>
+          <p:cNvSpPr txBox="1"/>
+          <p:nvPr/>
+        </p:nvSpPr>
+        <p:spPr>
+          <a:xfrm>
+            <a:off x="731520" y="1234440"/>
+            <a:ext cx="10515600" cy="457200"/>
+          </a:xfrm>
+          <a:prstGeom prst="rect">
+            <a:avLst/>
+          </a:prstGeom>
+          <a:noFill/>
+        </p:spPr>
+        <p:txBody>
+          <a:bodyPr wrap="square">
+            <a:spAutoFit/>
+          </a:bodyPr>
+          <a:lstStyle/>
+          <a:p>
+            <a:pPr>
+              <a:defRPr sz="1200">
+                <a:solidFill>
+                  <a:srgbClr val="64748B"/>
+                </a:solidFill>
+                <a:latin typeface="Arial"/>
+              </a:defRPr>
+            </a:pPr>
+            <a:r>
+              <a:t>Proving multi-metric lead-lag risk discovery across Retail and Industrial MRO sectors</a:t>
+            </a:r>
+          </a:p>
+        </p:txBody>
+      </p:sp>
+      <p:sp>
+        <p:nvSpPr>
+          <p:cNvPr id="6" name="Rounded Rectangle 5"/>
+          <p:cNvSpPr/>
+          <p:nvPr/>
+        </p:nvSpPr>
+        <p:spPr>
+          <a:xfrm>
+            <a:off x="731520" y="1828800"/>
+            <a:ext cx="5120640" cy="4206240"/>
+          </a:xfrm>
+          <a:prstGeom prst="roundRect">
+            <a:avLst/>
+          </a:prstGeom>
+          <a:solidFill>
+            <a:srgbClr val="FFFFFF"/>
+          </a:solidFill>
+          <a:ln w="12700">
+            <a:solidFill>
+              <a:srgbClr val="E2E8F0"/>
+            </a:solidFill>
+          </a:ln>
+        </p:spPr>
+        <p:style>
+          <a:lnRef idx="1">
+            <a:schemeClr val="accent1"/>
+          </a:lnRef>
+          <a:fillRef idx="3">
+            <a:schemeClr val="accent1"/>
+          </a:fillRef>
+          <a:effectRef idx="2">
+            <a:schemeClr val="accent1"/>
+          </a:effectRef>
+          <a:fontRef idx="minor">
+            <a:schemeClr val="lt1"/>
+          </a:fontRef>
+        </p:style>
+        <p:txBody>
+          <a:bodyPr rtlCol="0" anchor="ctr"/>
+          <a:lstStyle/>
+          <a:p>
+            <a:pPr algn="ctr"/>
+          </a:p>
+        </p:txBody>
+      </p:sp>
+      <p:sp>
+        <p:nvSpPr>
+          <p:cNvPr id="7" name="TextBox 6"/>
+          <p:cNvSpPr txBox="1"/>
+          <p:nvPr/>
+        </p:nvSpPr>
+        <p:spPr>
+          <a:xfrm>
+            <a:off x="914400" y="1965960"/>
+            <a:ext cx="4754880" cy="365760"/>
+          </a:xfrm>
+          <a:prstGeom prst="rect">
+            <a:avLst/>
+          </a:prstGeom>
+          <a:noFill/>
+        </p:spPr>
+        <p:txBody>
+          <a:bodyPr wrap="none">
+            <a:spAutoFit/>
+          </a:bodyPr>
+          <a:lstStyle/>
+          <a:p>
+            <a:pPr>
+              <a:defRPr sz="1300" b="1">
                 <a:solidFill>
                   <a:srgbClr val="0F172A"/>
                 </a:solidFill>
-              </a:defRPr>
-            </a:pPr>
-            <a:r>
-              <a:t>• 2. Multi-Dataset Temporal Alignment: Daily/weekly synchronization isolating co-occurring signals across orders, dispatches, complaints, and returns.</a:t>
-            </a:r>
-          </a:p>
-          <a:p>
-            <a:pPr>
-              <a:spcAft>
-                <a:spcPts val="1000"/>
-              </a:spcAft>
-              <a:defRPr sz="1350">
+                <a:latin typeface="Arial"/>
+              </a:defRPr>
+            </a:pPr>
+            <a:r>
+              <a:t>Domain A: Retail Logistics &amp; Commerce</a:t>
+            </a:r>
+          </a:p>
+        </p:txBody>
+      </p:sp>
+      <p:sp>
+        <p:nvSpPr>
+          <p:cNvPr id="8" name="TextBox 7"/>
+          <p:cNvSpPr txBox="1"/>
+          <p:nvPr/>
+        </p:nvSpPr>
+        <p:spPr>
+          <a:xfrm>
+            <a:off x="914400" y="2423160"/>
+            <a:ext cx="4754880" cy="3474720"/>
+          </a:xfrm>
+          <a:prstGeom prst="rect">
+            <a:avLst/>
+          </a:prstGeom>
+          <a:noFill/>
+        </p:spPr>
+        <p:txBody>
+          <a:bodyPr wrap="square">
+            <a:spAutoFit/>
+          </a:bodyPr>
+          <a:lstStyle/>
+          <a:p>
+            <a:pPr>
+              <a:defRPr sz="1200" b="1">
                 <a:solidFill>
                   <a:srgbClr val="0F172A"/>
                 </a:solidFill>
               </a:defRPr>
             </a:pPr>
             <a:r>
-              <a:t>• 3. Statistical Association Engine: Empirical Pearson and Spearman correlation analysis with automated lead-lag offset estimation.</a:t>
-            </a:r>
-          </a:p>
-          <a:p>
-            <a:pPr>
-              <a:spcAft>
-                <a:spcPts val="1000"/>
-              </a:spcAft>
-              <a:defRPr sz="1350">
+              <a:t>Scenario: Localized North Fulfillment Breakdown (Day 50+)</a:t>
+            </a:r>
+          </a:p>
+          <a:p>
+            <a:pPr>
+              <a:spcBef>
+                <a:spcPts val="600"/>
+              </a:spcBef>
+              <a:defRPr sz="1100">
+                <a:solidFill>
+                  <a:srgbClr val="64748B"/>
+                </a:solidFill>
+              </a:defRPr>
+            </a:pPr>
+            <a:r>
+              <a:t>• Day 50: Carrier transit delays in North surge from 0.10d to 2.78d (+2,568%, Z=56.4).</a:t>
+            </a:r>
+          </a:p>
+          <a:p>
+            <a:pPr>
+              <a:spcBef>
+                <a:spcPts val="600"/>
+              </a:spcBef>
+              <a:defRPr sz="1100">
+                <a:solidFill>
+                  <a:srgbClr val="64748B"/>
+                </a:solidFill>
+              </a:defRPr>
+            </a:pPr>
+            <a:r>
+              <a:t>• Day 52 (+2d): Customer service complaints spike +961%, led by 'Delayed Delivery'.</a:t>
+            </a:r>
+          </a:p>
+          <a:p>
+            <a:pPr>
+              <a:spcBef>
+                <a:spcPts val="600"/>
+              </a:spcBef>
+              <a:defRPr sz="1100">
+                <a:solidFill>
+                  <a:srgbClr val="64748B"/>
+                </a:solidFill>
+              </a:defRPr>
+            </a:pPr>
+            <a:r>
+              <a:t>• Day 54 (+4d): Refund disbursements escalate +276% ($14,200 return volume).</a:t>
+            </a:r>
+          </a:p>
+          <a:p>
+            <a:pPr>
+              <a:spcBef>
+                <a:spcPts val="600"/>
+              </a:spcBef>
+              <a:defRPr sz="1100">
+                <a:solidFill>
+                  <a:srgbClr val="64748B"/>
+                </a:solidFill>
+              </a:defRPr>
+            </a:pPr>
+            <a:r>
+              <a:t>• Day 56 (+6d): Warehouse inventory buffer stockouts jump from 3% to 44%.</a:t>
+            </a:r>
+          </a:p>
+          <a:p>
+            <a:pPr>
+              <a:spcBef>
+                <a:spcPts val="600"/>
+              </a:spcBef>
+              <a:defRPr sz="1100">
+                <a:solidFill>
+                  <a:srgbClr val="64748B"/>
+                </a:solidFill>
+              </a:defRPr>
+            </a:pPr>
+            <a:r>
+              <a:t>• Control Benchmark: South, East, and West hubs remain stable, isolating local carrier failure.</a:t>
+            </a:r>
+          </a:p>
+        </p:txBody>
+      </p:sp>
+      <p:sp>
+        <p:nvSpPr>
+          <p:cNvPr id="9" name="Rounded Rectangle 8"/>
+          <p:cNvSpPr/>
+          <p:nvPr/>
+        </p:nvSpPr>
+        <p:spPr>
+          <a:xfrm>
+            <a:off x="6217920" y="1828800"/>
+            <a:ext cx="5212080" cy="4206240"/>
+          </a:xfrm>
+          <a:prstGeom prst="roundRect">
+            <a:avLst/>
+          </a:prstGeom>
+          <a:solidFill>
+            <a:srgbClr val="FFFFFF"/>
+          </a:solidFill>
+          <a:ln w="12700">
+            <a:solidFill>
+              <a:srgbClr val="E2E8F0"/>
+            </a:solidFill>
+          </a:ln>
+        </p:spPr>
+        <p:style>
+          <a:lnRef idx="1">
+            <a:schemeClr val="accent1"/>
+          </a:lnRef>
+          <a:fillRef idx="3">
+            <a:schemeClr val="accent1"/>
+          </a:fillRef>
+          <a:effectRef idx="2">
+            <a:schemeClr val="accent1"/>
+          </a:effectRef>
+          <a:fontRef idx="minor">
+            <a:schemeClr val="lt1"/>
+          </a:fontRef>
+        </p:style>
+        <p:txBody>
+          <a:bodyPr rtlCol="0" anchor="ctr"/>
+          <a:lstStyle/>
+          <a:p>
+            <a:pPr algn="ctr"/>
+          </a:p>
+        </p:txBody>
+      </p:sp>
+      <p:sp>
+        <p:nvSpPr>
+          <p:cNvPr id="10" name="TextBox 9"/>
+          <p:cNvSpPr txBox="1"/>
+          <p:nvPr/>
+        </p:nvSpPr>
+        <p:spPr>
+          <a:xfrm>
+            <a:off x="6400800" y="1965960"/>
+            <a:ext cx="4846320" cy="365760"/>
+          </a:xfrm>
+          <a:prstGeom prst="rect">
+            <a:avLst/>
+          </a:prstGeom>
+          <a:noFill/>
+        </p:spPr>
+        <p:txBody>
+          <a:bodyPr wrap="none">
+            <a:spAutoFit/>
+          </a:bodyPr>
+          <a:lstStyle/>
+          <a:p>
+            <a:pPr>
+              <a:defRPr sz="1300" b="1">
                 <a:solidFill>
                   <a:srgbClr val="0F172A"/>
                 </a:solidFill>
-              </a:defRPr>
-            </a:pPr>
-            <a:r>
-              <a:t>• 4. Unaffected Cohort Benchmarking: Automated contrast of target incident segments against non-incident control cohorts.</a:t>
-            </a:r>
-          </a:p>
-          <a:p>
-            <a:pPr>
-              <a:spcAft>
-                <a:spcPts val="1000"/>
-              </a:spcAft>
-              <a:defRPr sz="1350">
+                <a:latin typeface="Arial"/>
+              </a:defRPr>
+            </a:pPr>
+            <a:r>
+              <a:t>Domain B: Industrial MRO Equipment</a:t>
+            </a:r>
+          </a:p>
+        </p:txBody>
+      </p:sp>
+      <p:sp>
+        <p:nvSpPr>
+          <p:cNvPr id="11" name="TextBox 10"/>
+          <p:cNvSpPr txBox="1"/>
+          <p:nvPr/>
+        </p:nvSpPr>
+        <p:spPr>
+          <a:xfrm>
+            <a:off x="6400800" y="2423160"/>
+            <a:ext cx="4846320" cy="3474720"/>
+          </a:xfrm>
+          <a:prstGeom prst="rect">
+            <a:avLst/>
+          </a:prstGeom>
+          <a:noFill/>
+        </p:spPr>
+        <p:txBody>
+          <a:bodyPr wrap="square">
+            <a:spAutoFit/>
+          </a:bodyPr>
+          <a:lstStyle/>
+          <a:p>
+            <a:pPr>
+              <a:defRPr sz="1200" b="1">
                 <a:solidFill>
                   <a:srgbClr val="0F172A"/>
                 </a:solidFill>
               </a:defRPr>
             </a:pPr>
             <a:r>
-              <a:t>• 5. Disciplined Synthesis: Explicit, tamper-proof separation of Observed Facts, Statistical Associations, Hypotheses, Competing Explanations, and Recommendations.</a:t>
+              <a:t>Scenario: Plant Alpha Mechanical Failure Cascade (Day 48+)</a:t>
+            </a:r>
+          </a:p>
+          <a:p>
+            <a:pPr>
+              <a:spcBef>
+                <a:spcPts val="600"/>
+              </a:spcBef>
+              <a:defRPr sz="1100">
+                <a:solidFill>
+                  <a:srgbClr val="64748B"/>
+                </a:solidFill>
+              </a:defRPr>
+            </a:pPr>
+            <a:r>
+              <a:t>• Day 48: Stamping press RMS vibration velocity surges from 2.1 to 8.4 mm/s (ISO 10816-3 breach).</a:t>
+            </a:r>
+          </a:p>
+          <a:p>
+            <a:pPr>
+              <a:spcBef>
+                <a:spcPts val="600"/>
+              </a:spcBef>
+              <a:defRPr sz="1100">
+                <a:solidFill>
+                  <a:srgbClr val="64748B"/>
+                </a:solidFill>
+              </a:defRPr>
+            </a:pPr>
+            <a:r>
+              <a:t>• Day 50 (+2d): Overdue Preventive Maintenance (PM) work order backlog surges 3.8x baseline.</a:t>
+            </a:r>
+          </a:p>
+          <a:p>
+            <a:pPr>
+              <a:spcBef>
+                <a:spcPts val="600"/>
+              </a:spcBef>
+              <a:defRPr sz="1100">
+                <a:solidFill>
+                  <a:srgbClr val="64748B"/>
+                </a:solidFill>
+              </a:defRPr>
+            </a:pPr>
+            <a:r>
+              <a:t>• Day 52 (+4d): Replacement precision roller bearing inventory reaches total exhaustion (0 units).</a:t>
+            </a:r>
+          </a:p>
+          <a:p>
+            <a:pPr>
+              <a:spcBef>
+                <a:spcPts val="600"/>
+              </a:spcBef>
+              <a:defRPr sz="1100">
+                <a:solidFill>
+                  <a:srgbClr val="64748B"/>
+                </a:solidFill>
+              </a:defRPr>
+            </a:pPr>
+            <a:r>
+              <a:t>• Day 53 (+5d): Catastrophic bearing seizure triggers 46.5-hr line stoppage ($280k loss).</a:t>
+            </a:r>
+          </a:p>
+          <a:p>
+            <a:pPr>
+              <a:spcBef>
+                <a:spcPts val="600"/>
+              </a:spcBef>
+              <a:defRPr sz="1100">
+                <a:solidFill>
+                  <a:srgbClr val="64748B"/>
+                </a:solidFill>
+              </a:defRPr>
+            </a:pPr>
+            <a:r>
+              <a:t>• Control Benchmark: Plants Beta, Gamma, and Delta maintain normal telemetry, ruling out supplier flaw.</a:t>
             </a:r>
           </a:p>
         </p:txBody>
@@ -4064,72 +5617,23 @@
       <p:grpSpPr/>
       <p:sp>
         <p:nvSpPr>
-          <p:cNvPr id="2" name="TextBox 1"/>
-          <p:cNvSpPr txBox="1"/>
-          <p:nvPr/>
-        </p:nvSpPr>
-        <p:spPr>
-          <a:xfrm>
-            <a:off x="731520" y="548640"/>
-            <a:ext cx="10698480" cy="1005840"/>
+          <p:cNvPr id="2" name="Rectangle 1"/>
+          <p:cNvSpPr/>
+          <p:nvPr/>
+        </p:nvSpPr>
+        <p:spPr>
+          <a:xfrm>
+            <a:off x="0" y="0"/>
+            <a:ext cx="12191695" cy="6858000"/>
           </a:xfrm>
           <a:prstGeom prst="rect">
-            <a:avLst/>
-          </a:prstGeom>
-          <a:noFill/>
-        </p:spPr>
-        <p:txBody>
-          <a:bodyPr wrap="square">
-            <a:spAutoFit/>
-          </a:bodyPr>
-          <a:lstStyle/>
-          <a:p>
-            <a:pPr>
-              <a:defRPr sz="2800" b="1">
-                <a:solidFill>
-                  <a:srgbClr val="0F172A"/>
-                </a:solidFill>
-              </a:defRPr>
-            </a:pPr>
-            <a:r>
-              <a:t>Live Product Architecture &amp; User Journey</a:t>
-            </a:r>
-          </a:p>
-          <a:p>
-            <a:pPr>
-              <a:defRPr sz="1300">
-                <a:solidFill>
-                  <a:srgbClr val="6366F1"/>
-                </a:solidFill>
-              </a:defRPr>
-            </a:pPr>
-            <a:r>
-              <a:t>From raw table ingestion to decision-support and audit-ready reporting</a:t>
-            </a:r>
-          </a:p>
-        </p:txBody>
-      </p:sp>
-      <p:sp>
-        <p:nvSpPr>
-          <p:cNvPr id="3" name="Rounded Rectangle 2"/>
-          <p:cNvSpPr/>
-          <p:nvPr/>
-        </p:nvSpPr>
-        <p:spPr>
-          <a:xfrm>
-            <a:off x="731520" y="1645920"/>
-            <a:ext cx="10728655" cy="4663440"/>
-          </a:xfrm>
-          <a:prstGeom prst="roundRect">
             <a:avLst/>
           </a:prstGeom>
           <a:solidFill>
             <a:srgbClr val="F8FAFC"/>
           </a:solidFill>
-          <a:ln w="19050">
-            <a:solidFill>
-              <a:srgbClr val="E2E8F0"/>
-            </a:solidFill>
+          <a:ln>
+            <a:noFill/>
           </a:ln>
         </p:spPr>
         <p:style>
@@ -4156,14 +5660,14 @@
       </p:sp>
       <p:sp>
         <p:nvSpPr>
-          <p:cNvPr id="4" name="TextBox 3"/>
+          <p:cNvPr id="3" name="TextBox 2"/>
           <p:cNvSpPr txBox="1"/>
           <p:nvPr/>
         </p:nvSpPr>
         <p:spPr>
           <a:xfrm>
-            <a:off x="1005840" y="1828800"/>
-            <a:ext cx="10149840" cy="4297680"/>
+            <a:off x="731520" y="365760"/>
+            <a:ext cx="7315200" cy="365760"/>
           </a:xfrm>
           <a:prstGeom prst="rect">
             <a:avLst/>
@@ -4177,92 +5681,555 @@
           <a:lstStyle/>
           <a:p>
             <a:pPr>
-              <a:spcAft>
-                <a:spcPts val="1000"/>
-              </a:spcAft>
-              <a:defRPr sz="1350">
+              <a:defRPr sz="1000" b="1">
+                <a:solidFill>
+                  <a:srgbClr val="6366F1"/>
+                </a:solidFill>
+                <a:latin typeface="Arial"/>
+              </a:defRPr>
+            </a:pPr>
+            <a:r>
+              <a:t>HIGH-PERFORMANCE ANALYTICS</a:t>
+            </a:r>
+          </a:p>
+        </p:txBody>
+      </p:sp>
+      <p:sp>
+        <p:nvSpPr>
+          <p:cNvPr id="4" name="TextBox 3"/>
+          <p:cNvSpPr txBox="1"/>
+          <p:nvPr/>
+        </p:nvSpPr>
+        <p:spPr>
+          <a:xfrm>
+            <a:off x="731520" y="640080"/>
+            <a:ext cx="10515600" cy="640080"/>
+          </a:xfrm>
+          <a:prstGeom prst="rect">
+            <a:avLst/>
+          </a:prstGeom>
+          <a:noFill/>
+        </p:spPr>
+        <p:txBody>
+          <a:bodyPr wrap="square">
+            <a:spAutoFit/>
+          </a:bodyPr>
+          <a:lstStyle/>
+          <a:p>
+            <a:pPr>
+              <a:defRPr sz="2400" b="1">
                 <a:solidFill>
                   <a:srgbClr val="0F172A"/>
                 </a:solidFill>
-              </a:defRPr>
-            </a:pPr>
-            <a:r>
-              <a:t>• Overview Dashboard: Live KPI pulse, signal onset trend curves, risk severity breakdown, and live database engine indicator.</a:t>
-            </a:r>
-          </a:p>
-          <a:p>
-            <a:pPr>
-              <a:spcAft>
-                <a:spcPts val="1000"/>
-              </a:spcAft>
-              <a:defRPr sz="1350">
+                <a:latin typeface="Arial"/>
+              </a:defRPr>
+            </a:pPr>
+            <a:r>
+              <a:t>Exasol Personal Analytical Integration</a:t>
+            </a:r>
+          </a:p>
+        </p:txBody>
+      </p:sp>
+      <p:sp>
+        <p:nvSpPr>
+          <p:cNvPr id="5" name="TextBox 4"/>
+          <p:cNvSpPr txBox="1"/>
+          <p:nvPr/>
+        </p:nvSpPr>
+        <p:spPr>
+          <a:xfrm>
+            <a:off x="731520" y="1234440"/>
+            <a:ext cx="10515600" cy="457200"/>
+          </a:xfrm>
+          <a:prstGeom prst="rect">
+            <a:avLst/>
+          </a:prstGeom>
+          <a:noFill/>
+        </p:spPr>
+        <p:txBody>
+          <a:bodyPr wrap="square">
+            <a:spAutoFit/>
+          </a:bodyPr>
+          <a:lstStyle/>
+          <a:p>
+            <a:pPr>
+              <a:defRPr sz="1200">
+                <a:solidFill>
+                  <a:srgbClr val="64748B"/>
+                </a:solidFill>
+                <a:latin typeface="Arial"/>
+              </a:defRPr>
+            </a:pPr>
+            <a:r>
+              <a:t>In-memory column-store analytical SQL with zero-downtime DuckDB fallback transparency</a:t>
+            </a:r>
+          </a:p>
+        </p:txBody>
+      </p:sp>
+      <p:sp>
+        <p:nvSpPr>
+          <p:cNvPr id="6" name="Rounded Rectangle 5"/>
+          <p:cNvSpPr/>
+          <p:nvPr/>
+        </p:nvSpPr>
+        <p:spPr>
+          <a:xfrm>
+            <a:off x="731520" y="1828800"/>
+            <a:ext cx="3328416" cy="4206240"/>
+          </a:xfrm>
+          <a:prstGeom prst="roundRect">
+            <a:avLst/>
+          </a:prstGeom>
+          <a:solidFill>
+            <a:srgbClr val="FFFFFF"/>
+          </a:solidFill>
+          <a:ln w="12700">
+            <a:solidFill>
+              <a:srgbClr val="E2E8F0"/>
+            </a:solidFill>
+          </a:ln>
+        </p:spPr>
+        <p:style>
+          <a:lnRef idx="1">
+            <a:schemeClr val="accent1"/>
+          </a:lnRef>
+          <a:fillRef idx="3">
+            <a:schemeClr val="accent1"/>
+          </a:fillRef>
+          <a:effectRef idx="2">
+            <a:schemeClr val="accent1"/>
+          </a:effectRef>
+          <a:fontRef idx="minor">
+            <a:schemeClr val="lt1"/>
+          </a:fontRef>
+        </p:style>
+        <p:txBody>
+          <a:bodyPr rtlCol="0" anchor="ctr"/>
+          <a:lstStyle/>
+          <a:p>
+            <a:pPr algn="ctr"/>
+          </a:p>
+        </p:txBody>
+      </p:sp>
+      <p:sp>
+        <p:nvSpPr>
+          <p:cNvPr id="7" name="TextBox 6"/>
+          <p:cNvSpPr txBox="1"/>
+          <p:nvPr/>
+        </p:nvSpPr>
+        <p:spPr>
+          <a:xfrm>
+            <a:off x="914400" y="1965960"/>
+            <a:ext cx="2962656" cy="365760"/>
+          </a:xfrm>
+          <a:prstGeom prst="rect">
+            <a:avLst/>
+          </a:prstGeom>
+          <a:noFill/>
+        </p:spPr>
+        <p:txBody>
+          <a:bodyPr wrap="none">
+            <a:spAutoFit/>
+          </a:bodyPr>
+          <a:lstStyle/>
+          <a:p>
+            <a:pPr>
+              <a:defRPr sz="1300" b="1">
                 <a:solidFill>
                   <a:srgbClr val="0F172A"/>
                 </a:solidFill>
-              </a:defRPr>
-            </a:pPr>
-            <a:r>
-              <a:t>• Data Explorer &amp; Profiler: Schema inspector, missing value percentages, record preview with search/filter, and safe CSV upload.</a:t>
-            </a:r>
-          </a:p>
-          <a:p>
-            <a:pPr>
-              <a:spcAft>
-                <a:spcPts val="1000"/>
-              </a:spcAft>
-              <a:defRPr sz="1350">
+                <a:latin typeface="Arial"/>
+              </a:defRPr>
+            </a:pPr>
+            <a:r>
+              <a:t>Official pyexasol Driver</a:t>
+            </a:r>
+          </a:p>
+        </p:txBody>
+      </p:sp>
+      <p:sp>
+        <p:nvSpPr>
+          <p:cNvPr id="8" name="TextBox 7"/>
+          <p:cNvSpPr txBox="1"/>
+          <p:nvPr/>
+        </p:nvSpPr>
+        <p:spPr>
+          <a:xfrm>
+            <a:off x="914400" y="2468880"/>
+            <a:ext cx="2962656" cy="3383280"/>
+          </a:xfrm>
+          <a:prstGeom prst="rect">
+            <a:avLst/>
+          </a:prstGeom>
+          <a:noFill/>
+        </p:spPr>
+        <p:txBody>
+          <a:bodyPr wrap="square">
+            <a:spAutoFit/>
+          </a:bodyPr>
+          <a:lstStyle/>
+          <a:p>
+            <a:pPr>
+              <a:defRPr sz="1150">
+                <a:solidFill>
+                  <a:srgbClr val="64748B"/>
+                </a:solidFill>
+              </a:defRPr>
+            </a:pPr>
+            <a:r>
+              <a:t>• Native WebSocket JSON-RPC connection via pyexasol 3.0.1.</a:t>
+            </a:r>
+          </a:p>
+          <a:p>
+            <a:pPr>
+              <a:spcBef>
+                <a:spcPts val="800"/>
+              </a:spcBef>
+              <a:defRPr sz="1150">
+                <a:solidFill>
+                  <a:srgbClr val="64748B"/>
+                </a:solidFill>
+              </a:defRPr>
+            </a:pPr>
+            <a:r>
+              <a:t>• High-throughput execution of complex analytical SQL aggregations across multi-table operational schemas.</a:t>
+            </a:r>
+          </a:p>
+          <a:p>
+            <a:pPr>
+              <a:spcBef>
+                <a:spcPts val="800"/>
+              </a:spcBef>
+              <a:defRPr sz="1150">
+                <a:solidFill>
+                  <a:srgbClr val="64748B"/>
+                </a:solidFill>
+              </a:defRPr>
+            </a:pPr>
+            <a:r>
+              <a:t>• Schema bootstrapping and automated CSV table staging.</a:t>
+            </a:r>
+          </a:p>
+          <a:p>
+            <a:pPr>
+              <a:spcBef>
+                <a:spcPts val="800"/>
+              </a:spcBef>
+              <a:defRPr sz="1150">
+                <a:solidFill>
+                  <a:srgbClr val="64748B"/>
+                </a:solidFill>
+              </a:defRPr>
+            </a:pPr>
+            <a:r>
+              <a:t>• Active health monitoring measuring round-trip query latency and SYS.EXA_METADATA versioning.</a:t>
+            </a:r>
+          </a:p>
+        </p:txBody>
+      </p:sp>
+      <p:sp>
+        <p:nvSpPr>
+          <p:cNvPr id="9" name="Rounded Rectangle 8"/>
+          <p:cNvSpPr/>
+          <p:nvPr/>
+        </p:nvSpPr>
+        <p:spPr>
+          <a:xfrm>
+            <a:off x="4425696" y="1828800"/>
+            <a:ext cx="3328416" cy="4206240"/>
+          </a:xfrm>
+          <a:prstGeom prst="roundRect">
+            <a:avLst/>
+          </a:prstGeom>
+          <a:solidFill>
+            <a:srgbClr val="FFFFFF"/>
+          </a:solidFill>
+          <a:ln w="12700">
+            <a:solidFill>
+              <a:srgbClr val="E2E8F0"/>
+            </a:solidFill>
+          </a:ln>
+        </p:spPr>
+        <p:style>
+          <a:lnRef idx="1">
+            <a:schemeClr val="accent1"/>
+          </a:lnRef>
+          <a:fillRef idx="3">
+            <a:schemeClr val="accent1"/>
+          </a:fillRef>
+          <a:effectRef idx="2">
+            <a:schemeClr val="accent1"/>
+          </a:effectRef>
+          <a:fontRef idx="minor">
+            <a:schemeClr val="lt1"/>
+          </a:fontRef>
+        </p:style>
+        <p:txBody>
+          <a:bodyPr rtlCol="0" anchor="ctr"/>
+          <a:lstStyle/>
+          <a:p>
+            <a:pPr algn="ctr"/>
+          </a:p>
+        </p:txBody>
+      </p:sp>
+      <p:sp>
+        <p:nvSpPr>
+          <p:cNvPr id="10" name="TextBox 9"/>
+          <p:cNvSpPr txBox="1"/>
+          <p:nvPr/>
+        </p:nvSpPr>
+        <p:spPr>
+          <a:xfrm>
+            <a:off x="4608576" y="1965960"/>
+            <a:ext cx="2962656" cy="365760"/>
+          </a:xfrm>
+          <a:prstGeom prst="rect">
+            <a:avLst/>
+          </a:prstGeom>
+          <a:noFill/>
+        </p:spPr>
+        <p:txBody>
+          <a:bodyPr wrap="none">
+            <a:spAutoFit/>
+          </a:bodyPr>
+          <a:lstStyle/>
+          <a:p>
+            <a:pPr>
+              <a:defRPr sz="1300" b="1">
                 <a:solidFill>
                   <a:srgbClr val="0F172A"/>
                 </a:solidFill>
-              </a:defRPr>
-            </a:pPr>
-            <a:r>
-              <a:t>• Signal Detection Engine: Granular inspection of observed vs baseline metrics, confidence scores, and detection methods.</a:t>
-            </a:r>
-          </a:p>
-          <a:p>
-            <a:pPr>
-              <a:spcAft>
-                <a:spcPts val="1000"/>
-              </a:spcAft>
-              <a:defRPr sz="1350">
+                <a:latin typeface="Arial"/>
+              </a:defRPr>
+            </a:pPr>
+            <a:r>
+              <a:t>Database Adapter Architecture</a:t>
+            </a:r>
+          </a:p>
+        </p:txBody>
+      </p:sp>
+      <p:sp>
+        <p:nvSpPr>
+          <p:cNvPr id="11" name="TextBox 10"/>
+          <p:cNvSpPr txBox="1"/>
+          <p:nvPr/>
+        </p:nvSpPr>
+        <p:spPr>
+          <a:xfrm>
+            <a:off x="4608576" y="2468880"/>
+            <a:ext cx="2962656" cy="3383280"/>
+          </a:xfrm>
+          <a:prstGeom prst="rect">
+            <a:avLst/>
+          </a:prstGeom>
+          <a:noFill/>
+        </p:spPr>
+        <p:txBody>
+          <a:bodyPr wrap="square">
+            <a:spAutoFit/>
+          </a:bodyPr>
+          <a:lstStyle/>
+          <a:p>
+            <a:pPr>
+              <a:defRPr sz="1150">
+                <a:solidFill>
+                  <a:srgbClr val="64748B"/>
+                </a:solidFill>
+              </a:defRPr>
+            </a:pPr>
+            <a:r>
+              <a:t>• Polymorphic DatabaseAdapter abstraction isolates analytical logic from underlying storage.</a:t>
+            </a:r>
+          </a:p>
+          <a:p>
+            <a:pPr>
+              <a:spcBef>
+                <a:spcPts val="800"/>
+              </a:spcBef>
+              <a:defRPr sz="1150">
+                <a:solidFill>
+                  <a:srgbClr val="64748B"/>
+                </a:solidFill>
+              </a:defRPr>
+            </a:pPr>
+            <a:r>
+              <a:t>• Seamless switching between Exasol Personal and DuckDB local in-process OLAP.</a:t>
+            </a:r>
+          </a:p>
+          <a:p>
+            <a:pPr>
+              <a:spcBef>
+                <a:spcPts val="800"/>
+              </a:spcBef>
+              <a:defRPr sz="1150">
+                <a:solidFill>
+                  <a:srgbClr val="64748B"/>
+                </a:solidFill>
+              </a:defRPr>
+            </a:pPr>
+            <a:r>
+              <a:t>• Zero external runtime blocker: hackathon judges can explore the complete application offline without local Docker setup.</a:t>
+            </a:r>
+          </a:p>
+        </p:txBody>
+      </p:sp>
+      <p:sp>
+        <p:nvSpPr>
+          <p:cNvPr id="12" name="Rounded Rectangle 11"/>
+          <p:cNvSpPr/>
+          <p:nvPr/>
+        </p:nvSpPr>
+        <p:spPr>
+          <a:xfrm>
+            <a:off x="8119872" y="1828800"/>
+            <a:ext cx="3328416" cy="4206240"/>
+          </a:xfrm>
+          <a:prstGeom prst="roundRect">
+            <a:avLst/>
+          </a:prstGeom>
+          <a:solidFill>
+            <a:srgbClr val="FFFFFF"/>
+          </a:solidFill>
+          <a:ln w="12700">
+            <a:solidFill>
+              <a:srgbClr val="E2E8F0"/>
+            </a:solidFill>
+          </a:ln>
+        </p:spPr>
+        <p:style>
+          <a:lnRef idx="1">
+            <a:schemeClr val="accent1"/>
+          </a:lnRef>
+          <a:fillRef idx="3">
+            <a:schemeClr val="accent1"/>
+          </a:fillRef>
+          <a:effectRef idx="2">
+            <a:schemeClr val="accent1"/>
+          </a:effectRef>
+          <a:fontRef idx="minor">
+            <a:schemeClr val="lt1"/>
+          </a:fontRef>
+        </p:style>
+        <p:txBody>
+          <a:bodyPr rtlCol="0" anchor="ctr"/>
+          <a:lstStyle/>
+          <a:p>
+            <a:pPr algn="ctr"/>
+          </a:p>
+        </p:txBody>
+      </p:sp>
+      <p:sp>
+        <p:nvSpPr>
+          <p:cNvPr id="13" name="TextBox 12"/>
+          <p:cNvSpPr txBox="1"/>
+          <p:nvPr/>
+        </p:nvSpPr>
+        <p:spPr>
+          <a:xfrm>
+            <a:off x="8302752" y="1965960"/>
+            <a:ext cx="2962656" cy="365760"/>
+          </a:xfrm>
+          <a:prstGeom prst="rect">
+            <a:avLst/>
+          </a:prstGeom>
+          <a:noFill/>
+        </p:spPr>
+        <p:txBody>
+          <a:bodyPr wrap="none">
+            <a:spAutoFit/>
+          </a:bodyPr>
+          <a:lstStyle/>
+          <a:p>
+            <a:pPr>
+              <a:defRPr sz="1300" b="1">
                 <a:solidFill>
                   <a:srgbClr val="0F172A"/>
                 </a:solidFill>
-              </a:defRPr>
-            </a:pPr>
-            <a:r>
-              <a:t>• Cross-Metric Investigation: Co-occurrence clusters, lead-lag offsets, and control cohort comparisons.</a:t>
-            </a:r>
-          </a:p>
-          <a:p>
-            <a:pPr>
-              <a:spcAft>
-                <a:spcPts val="1000"/>
-              </a:spcAft>
-              <a:defRPr sz="1350">
-                <a:solidFill>
-                  <a:srgbClr val="0F172A"/>
-                </a:solidFill>
-              </a:defRPr>
-            </a:pPr>
-            <a:r>
-              <a:t>• Interactive Risk Map &amp; Workspace: Topological segment network, priority assignments (P1-P3), and conclusion logging.</a:t>
-            </a:r>
-          </a:p>
-          <a:p>
-            <a:pPr>
-              <a:spcAft>
-                <a:spcPts val="1000"/>
-              </a:spcAft>
-              <a:defRPr sz="1350">
-                <a:solidFill>
-                  <a:srgbClr val="0F172A"/>
-                </a:solidFill>
-              </a:defRPr>
-            </a:pPr>
-            <a:r>
-              <a:t>• What-If Stress Testing &amp; Export: Arithmetic vs model projections, and one-click Executive PDF/JSON/CSV downloads.</a:t>
+                <a:latin typeface="Arial"/>
+              </a:defRPr>
+            </a:pPr>
+            <a:r>
+              <a:t>Strict Transparency Mandate</a:t>
+            </a:r>
+          </a:p>
+        </p:txBody>
+      </p:sp>
+      <p:sp>
+        <p:nvSpPr>
+          <p:cNvPr id="14" name="TextBox 13"/>
+          <p:cNvSpPr txBox="1"/>
+          <p:nvPr/>
+        </p:nvSpPr>
+        <p:spPr>
+          <a:xfrm>
+            <a:off x="8302752" y="2468880"/>
+            <a:ext cx="2962656" cy="3383280"/>
+          </a:xfrm>
+          <a:prstGeom prst="rect">
+            <a:avLst/>
+          </a:prstGeom>
+          <a:noFill/>
+        </p:spPr>
+        <p:txBody>
+          <a:bodyPr wrap="square">
+            <a:spAutoFit/>
+          </a:bodyPr>
+          <a:lstStyle/>
+          <a:p>
+            <a:pPr>
+              <a:defRPr sz="1150">
+                <a:solidFill>
+                  <a:srgbClr val="64748B"/>
+                </a:solidFill>
+              </a:defRPr>
+            </a:pPr>
+            <a:r>
+              <a:t>• Visible real-time database status indicator in top navigation bar.</a:t>
+            </a:r>
+          </a:p>
+          <a:p>
+            <a:pPr>
+              <a:spcBef>
+                <a:spcPts val="800"/>
+              </a:spcBef>
+              <a:defRPr sz="1150">
+                <a:solidFill>
+                  <a:srgbClr val="64748B"/>
+                </a:solidFill>
+              </a:defRPr>
+            </a:pPr>
+            <a:r>
+              <a:t>• Clearly reveals active engine: 'Exasol Personal' vs 'DuckDB Local (Fallback)'.</a:t>
+            </a:r>
+          </a:p>
+          <a:p>
+            <a:pPr>
+              <a:spcBef>
+                <a:spcPts val="800"/>
+              </a:spcBef>
+              <a:defRPr sz="1150">
+                <a:solidFill>
+                  <a:srgbClr val="64748B"/>
+                </a:solidFill>
+              </a:defRPr>
+            </a:pPr>
+            <a:r>
+              <a:t>• Local calculations are NEVER labeled as Exasol-powered.</a:t>
+            </a:r>
+          </a:p>
+          <a:p>
+            <a:pPr>
+              <a:spcBef>
+                <a:spcPts val="800"/>
+              </a:spcBef>
+              <a:defRPr sz="1150">
+                <a:solidFill>
+                  <a:srgbClr val="64748B"/>
+                </a:solidFill>
+              </a:defRPr>
+            </a:pPr>
+            <a:r>
+              <a:t>• Production-grade credential hygiene via environment variables (.env).</a:t>
             </a:r>
           </a:p>
         </p:txBody>
@@ -4287,72 +6254,23 @@
       <p:grpSpPr/>
       <p:sp>
         <p:nvSpPr>
-          <p:cNvPr id="2" name="TextBox 1"/>
-          <p:cNvSpPr txBox="1"/>
-          <p:nvPr/>
-        </p:nvSpPr>
-        <p:spPr>
-          <a:xfrm>
-            <a:off x="731520" y="548640"/>
-            <a:ext cx="10698480" cy="1005840"/>
+          <p:cNvPr id="2" name="Rectangle 1"/>
+          <p:cNvSpPr/>
+          <p:nvPr/>
+        </p:nvSpPr>
+        <p:spPr>
+          <a:xfrm>
+            <a:off x="0" y="0"/>
+            <a:ext cx="12191695" cy="6858000"/>
           </a:xfrm>
           <a:prstGeom prst="rect">
-            <a:avLst/>
-          </a:prstGeom>
-          <a:noFill/>
-        </p:spPr>
-        <p:txBody>
-          <a:bodyPr wrap="square">
-            <a:spAutoFit/>
-          </a:bodyPr>
-          <a:lstStyle/>
-          <a:p>
-            <a:pPr>
-              <a:defRPr sz="2800" b="1">
-                <a:solidFill>
-                  <a:srgbClr val="0F172A"/>
-                </a:solidFill>
-              </a:defRPr>
-            </a:pPr>
-            <a:r>
-              <a:t>Technical Architecture &amp; Exasol Integration</a:t>
-            </a:r>
-          </a:p>
-          <a:p>
-            <a:pPr>
-              <a:defRPr sz="1300">
-                <a:solidFill>
-                  <a:srgbClr val="6366F1"/>
-                </a:solidFill>
-              </a:defRPr>
-            </a:pPr>
-            <a:r>
-              <a:t>High-throughput SQL analytics with seamless local fallback transparency</a:t>
-            </a:r>
-          </a:p>
-        </p:txBody>
-      </p:sp>
-      <p:sp>
-        <p:nvSpPr>
-          <p:cNvPr id="3" name="Rounded Rectangle 2"/>
-          <p:cNvSpPr/>
-          <p:nvPr/>
-        </p:nvSpPr>
-        <p:spPr>
-          <a:xfrm>
-            <a:off x="731520" y="1645920"/>
-            <a:ext cx="10728655" cy="4663440"/>
-          </a:xfrm>
-          <a:prstGeom prst="roundRect">
             <a:avLst/>
           </a:prstGeom>
           <a:solidFill>
             <a:srgbClr val="F8FAFC"/>
           </a:solidFill>
-          <a:ln w="19050">
-            <a:solidFill>
-              <a:srgbClr val="E2E8F0"/>
-            </a:solidFill>
+          <a:ln>
+            <a:noFill/>
           </a:ln>
         </p:spPr>
         <p:style>
@@ -4379,14 +6297,14 @@
       </p:sp>
       <p:sp>
         <p:nvSpPr>
-          <p:cNvPr id="4" name="TextBox 3"/>
+          <p:cNvPr id="3" name="TextBox 2"/>
           <p:cNvSpPr txBox="1"/>
           <p:nvPr/>
         </p:nvSpPr>
         <p:spPr>
           <a:xfrm>
-            <a:off x="1005840" y="1828800"/>
-            <a:ext cx="10149840" cy="4297680"/>
+            <a:off x="731520" y="365760"/>
+            <a:ext cx="7315200" cy="365760"/>
           </a:xfrm>
           <a:prstGeom prst="rect">
             <a:avLst/>
@@ -4400,77 +6318,513 @@
           <a:lstStyle/>
           <a:p>
             <a:pPr>
-              <a:spcAft>
-                <a:spcPts val="1000"/>
-              </a:spcAft>
-              <a:defRPr sz="1350">
+              <a:defRPr sz="1000" b="1">
+                <a:solidFill>
+                  <a:srgbClr val="6366F1"/>
+                </a:solidFill>
+                <a:latin typeface="Arial"/>
+              </a:defRPr>
+            </a:pPr>
+            <a:r>
+              <a:t>EMPIRICAL VALIDATION</a:t>
+            </a:r>
+          </a:p>
+        </p:txBody>
+      </p:sp>
+      <p:sp>
+        <p:nvSpPr>
+          <p:cNvPr id="4" name="TextBox 3"/>
+          <p:cNvSpPr txBox="1"/>
+          <p:nvPr/>
+        </p:nvSpPr>
+        <p:spPr>
+          <a:xfrm>
+            <a:off x="731520" y="640080"/>
+            <a:ext cx="10515600" cy="640080"/>
+          </a:xfrm>
+          <a:prstGeom prst="rect">
+            <a:avLst/>
+          </a:prstGeom>
+          <a:noFill/>
+        </p:spPr>
+        <p:txBody>
+          <a:bodyPr wrap="square">
+            <a:spAutoFit/>
+          </a:bodyPr>
+          <a:lstStyle/>
+          <a:p>
+            <a:pPr>
+              <a:defRPr sz="2400" b="1">
                 <a:solidFill>
                   <a:srgbClr val="0F172A"/>
                 </a:solidFill>
-              </a:defRPr>
-            </a:pPr>
-            <a:r>
-              <a:t>• Analytical Storage Layer: Native Exasol Personal integration via official pyexasol driver (WebSocket JSON-RPC).</a:t>
-            </a:r>
-          </a:p>
-          <a:p>
-            <a:pPr>
-              <a:spcAft>
-                <a:spcPts val="1000"/>
-              </a:spcAft>
-              <a:defRPr sz="1350">
+                <a:latin typeface="Arial"/>
+              </a:defRPr>
+            </a:pPr>
+            <a:r>
+              <a:t>Ground-Truth Evaluation &amp; Accuracy Benchmark</a:t>
+            </a:r>
+          </a:p>
+        </p:txBody>
+      </p:sp>
+      <p:sp>
+        <p:nvSpPr>
+          <p:cNvPr id="5" name="TextBox 4"/>
+          <p:cNvSpPr txBox="1"/>
+          <p:nvPr/>
+        </p:nvSpPr>
+        <p:spPr>
+          <a:xfrm>
+            <a:off x="731520" y="1234440"/>
+            <a:ext cx="10515600" cy="457200"/>
+          </a:xfrm>
+          <a:prstGeom prst="rect">
+            <a:avLst/>
+          </a:prstGeom>
+          <a:noFill/>
+        </p:spPr>
+        <p:txBody>
+          <a:bodyPr wrap="square">
+            <a:spAutoFit/>
+          </a:bodyPr>
+          <a:lstStyle/>
+          <a:p>
+            <a:pPr>
+              <a:defRPr sz="1200">
+                <a:solidFill>
+                  <a:srgbClr val="64748B"/>
+                </a:solidFill>
+                <a:latin typeface="Arial"/>
+              </a:defRPr>
+            </a:pPr>
+            <a:r>
+              <a:t>Audited performance comparison against a traditional static percent-change baseline</a:t>
+            </a:r>
+          </a:p>
+        </p:txBody>
+      </p:sp>
+      <p:sp>
+        <p:nvSpPr>
+          <p:cNvPr id="6" name="Rounded Rectangle 5"/>
+          <p:cNvSpPr/>
+          <p:nvPr/>
+        </p:nvSpPr>
+        <p:spPr>
+          <a:xfrm>
+            <a:off x="731520" y="1828800"/>
+            <a:ext cx="10728655" cy="4206240"/>
+          </a:xfrm>
+          <a:prstGeom prst="roundRect">
+            <a:avLst/>
+          </a:prstGeom>
+          <a:solidFill>
+            <a:srgbClr val="FFFFFF"/>
+          </a:solidFill>
+          <a:ln w="12700">
+            <a:solidFill>
+              <a:srgbClr val="E2E8F0"/>
+            </a:solidFill>
+          </a:ln>
+        </p:spPr>
+        <p:style>
+          <a:lnRef idx="1">
+            <a:schemeClr val="accent1"/>
+          </a:lnRef>
+          <a:fillRef idx="3">
+            <a:schemeClr val="accent1"/>
+          </a:fillRef>
+          <a:effectRef idx="2">
+            <a:schemeClr val="accent1"/>
+          </a:effectRef>
+          <a:fontRef idx="minor">
+            <a:schemeClr val="lt1"/>
+          </a:fontRef>
+        </p:style>
+        <p:txBody>
+          <a:bodyPr rtlCol="0" anchor="ctr"/>
+          <a:lstStyle/>
+          <a:p>
+            <a:pPr algn="ctr"/>
+          </a:p>
+        </p:txBody>
+      </p:sp>
+      <p:sp>
+        <p:nvSpPr>
+          <p:cNvPr id="7" name="TextBox 6"/>
+          <p:cNvSpPr txBox="1"/>
+          <p:nvPr/>
+        </p:nvSpPr>
+        <p:spPr>
+          <a:xfrm>
+            <a:off x="914400" y="1965960"/>
+            <a:ext cx="10362895" cy="365760"/>
+          </a:xfrm>
+          <a:prstGeom prst="rect">
+            <a:avLst/>
+          </a:prstGeom>
+          <a:noFill/>
+        </p:spPr>
+        <p:txBody>
+          <a:bodyPr wrap="none">
+            <a:spAutoFit/>
+          </a:bodyPr>
+          <a:lstStyle/>
+          <a:p>
+            <a:pPr>
+              <a:defRPr sz="1300" b="1">
                 <a:solidFill>
                   <a:srgbClr val="0F172A"/>
                 </a:solidFill>
-              </a:defRPr>
-            </a:pPr>
-            <a:r>
-              <a:t>• Database Adapter Architecture: Unified DatabaseAdapter interface supporting Exasol Personal and DuckDB in-process OLAP.</a:t>
-            </a:r>
-          </a:p>
-          <a:p>
-            <a:pPr>
-              <a:spcAft>
-                <a:spcPts val="1000"/>
-              </a:spcAft>
-              <a:defRPr sz="1350">
+                <a:latin typeface="Arial"/>
+              </a:defRPr>
+            </a:pPr>
+            <a:r>
+              <a:t>Benchmark Comparison (13 Datasets, 60,653 Records)</a:t>
+            </a:r>
+          </a:p>
+        </p:txBody>
+      </p:sp>
+      <p:sp>
+        <p:nvSpPr>
+          <p:cNvPr id="8" name="TextBox 7"/>
+          <p:cNvSpPr txBox="1"/>
+          <p:nvPr/>
+        </p:nvSpPr>
+        <p:spPr>
+          <a:xfrm>
+            <a:off x="914400" y="2377440"/>
+            <a:ext cx="10332720" cy="3474720"/>
+          </a:xfrm>
+          <a:prstGeom prst="rect">
+            <a:avLst/>
+          </a:prstGeom>
+          <a:noFill/>
+        </p:spPr>
+        <p:txBody>
+          <a:bodyPr wrap="square">
+            <a:spAutoFit/>
+          </a:bodyPr>
+          <a:lstStyle/>
+          <a:p>
+            <a:pPr>
+              <a:defRPr sz="1200" b="1">
                 <a:solidFill>
                   <a:srgbClr val="0F172A"/>
                 </a:solidFill>
               </a:defRPr>
             </a:pPr>
             <a:r>
-              <a:t>• Status Transparency: Clear indicator in UI and API ('Exasol Personal' vs 'DuckDB Local'). Never mislabels local calculations.</a:t>
-            </a:r>
-          </a:p>
-          <a:p>
-            <a:pPr>
-              <a:spcAft>
-                <a:spcPts val="1000"/>
-              </a:spcAft>
-              <a:defRPr sz="1350">
+              <a:t>Metric Results on Injected Operational Crises:</a:t>
+            </a:r>
+          </a:p>
+        </p:txBody>
+      </p:sp>
+      <p:sp>
+        <p:nvSpPr>
+          <p:cNvPr id="9" name="Rounded Rectangle 8"/>
+          <p:cNvSpPr/>
+          <p:nvPr/>
+        </p:nvSpPr>
+        <p:spPr>
+          <a:xfrm>
+            <a:off x="1097280" y="2834640"/>
+            <a:ext cx="4754880" cy="2743200"/>
+          </a:xfrm>
+          <a:prstGeom prst="roundRect">
+            <a:avLst/>
+          </a:prstGeom>
+          <a:solidFill>
+            <a:srgbClr val="F0FDFA"/>
+          </a:solidFill>
+          <a:ln>
+            <a:solidFill>
+              <a:srgbClr val="10B981"/>
+            </a:solidFill>
+          </a:ln>
+        </p:spPr>
+        <p:style>
+          <a:lnRef idx="1">
+            <a:schemeClr val="accent1"/>
+          </a:lnRef>
+          <a:fillRef idx="3">
+            <a:schemeClr val="accent1"/>
+          </a:fillRef>
+          <a:effectRef idx="2">
+            <a:schemeClr val="accent1"/>
+          </a:effectRef>
+          <a:fontRef idx="minor">
+            <a:schemeClr val="lt1"/>
+          </a:fontRef>
+        </p:style>
+        <p:txBody>
+          <a:bodyPr rtlCol="0" anchor="ctr"/>
+          <a:lstStyle/>
+          <a:p>
+            <a:pPr algn="ctr"/>
+          </a:p>
+        </p:txBody>
+      </p:sp>
+      <p:sp>
+        <p:nvSpPr>
+          <p:cNvPr id="10" name="TextBox 9"/>
+          <p:cNvSpPr txBox="1"/>
+          <p:nvPr/>
+        </p:nvSpPr>
+        <p:spPr>
+          <a:xfrm>
+            <a:off x="1280160" y="2926080"/>
+            <a:ext cx="4389120" cy="2560320"/>
+          </a:xfrm>
+          <a:prstGeom prst="rect">
+            <a:avLst/>
+          </a:prstGeom>
+          <a:noFill/>
+        </p:spPr>
+        <p:txBody>
+          <a:bodyPr wrap="square">
+            <a:spAutoFit/>
+          </a:bodyPr>
+          <a:lstStyle/>
+          <a:p>
+            <a:pPr>
+              <a:defRPr b="1" sz="1300">
+                <a:solidFill>
+                  <a:srgbClr val="10B981"/>
+                </a:solidFill>
+              </a:defRPr>
+            </a:pPr>
+            <a:r>
+              <a:t>SIGNALFIRE AI (Robust MAD &amp; IQR)</a:t>
+            </a:r>
+          </a:p>
+          <a:p>
+            <a:pPr>
+              <a:spcBef>
+                <a:spcPts val="400"/>
+              </a:spcBef>
+              <a:defRPr sz="1100">
                 <a:solidFill>
                   <a:srgbClr val="0F172A"/>
                 </a:solidFill>
               </a:defRPr>
             </a:pPr>
             <a:r>
-              <a:t>• API &amp; Analytical Core: FastAPI, Pydantic v2, Pandas, NumPy, Scikit-learn, SciPy, and ReportLab.</a:t>
-            </a:r>
-          </a:p>
-          <a:p>
-            <a:pPr>
-              <a:spcAft>
-                <a:spcPts val="1000"/>
-              </a:spcAft>
-              <a:defRPr sz="1350">
+              <a:t>• Precision: 70.0% (Suppresses cyclical variance)</a:t>
+            </a:r>
+          </a:p>
+          <a:p>
+            <a:pPr>
+              <a:spcBef>
+                <a:spcPts val="400"/>
+              </a:spcBef>
+              <a:defRPr sz="1100">
                 <a:solidFill>
                   <a:srgbClr val="0F172A"/>
                 </a:solidFill>
               </a:defRPr>
             </a:pPr>
             <a:r>
-              <a:t>• Frontend Design Language: React, TypeScript, Vite, Tailwind CSS, Recharts, and refined 3D glassmorphism.</a:t>
+              <a:t>• Recall: 77.8% (Catches cross-metric cascades)</a:t>
+            </a:r>
+          </a:p>
+          <a:p>
+            <a:pPr>
+              <a:spcBef>
+                <a:spcPts val="400"/>
+              </a:spcBef>
+              <a:defRPr sz="1100">
+                <a:solidFill>
+                  <a:srgbClr val="0F172A"/>
+                </a:solidFill>
+              </a:defRPr>
+            </a:pPr>
+            <a:r>
+              <a:t>• F1-Score: 0.737 (High signal fidelity)</a:t>
+            </a:r>
+          </a:p>
+          <a:p>
+            <a:pPr>
+              <a:spcBef>
+                <a:spcPts val="400"/>
+              </a:spcBef>
+              <a:defRPr sz="1100">
+                <a:solidFill>
+                  <a:srgbClr val="0F172A"/>
+                </a:solidFill>
+              </a:defRPr>
+            </a:pPr>
+            <a:r>
+              <a:t>• False Positives: 3 (Robust noise rejection)</a:t>
+            </a:r>
+          </a:p>
+          <a:p>
+            <a:pPr>
+              <a:spcBef>
+                <a:spcPts val="400"/>
+              </a:spcBef>
+              <a:defRPr sz="1100">
+                <a:solidFill>
+                  <a:srgbClr val="0F172A"/>
+                </a:solidFill>
+              </a:defRPr>
+            </a:pPr>
+            <a:r>
+              <a:t>• Method: Non-parametric MAD fences &amp; control cohort offsets</a:t>
+            </a:r>
+          </a:p>
+        </p:txBody>
+      </p:sp>
+      <p:sp>
+        <p:nvSpPr>
+          <p:cNvPr id="11" name="Rounded Rectangle 10"/>
+          <p:cNvSpPr/>
+          <p:nvPr/>
+        </p:nvSpPr>
+        <p:spPr>
+          <a:xfrm>
+            <a:off x="6217920" y="2834640"/>
+            <a:ext cx="4754880" cy="2743200"/>
+          </a:xfrm>
+          <a:prstGeom prst="roundRect">
+            <a:avLst/>
+          </a:prstGeom>
+          <a:solidFill>
+            <a:srgbClr val="FEF2F2"/>
+          </a:solidFill>
+          <a:ln>
+            <a:solidFill>
+              <a:srgbClr val="EF4444"/>
+            </a:solidFill>
+          </a:ln>
+        </p:spPr>
+        <p:style>
+          <a:lnRef idx="1">
+            <a:schemeClr val="accent1"/>
+          </a:lnRef>
+          <a:fillRef idx="3">
+            <a:schemeClr val="accent1"/>
+          </a:fillRef>
+          <a:effectRef idx="2">
+            <a:schemeClr val="accent1"/>
+          </a:effectRef>
+          <a:fontRef idx="minor">
+            <a:schemeClr val="lt1"/>
+          </a:fontRef>
+        </p:style>
+        <p:txBody>
+          <a:bodyPr rtlCol="0" anchor="ctr"/>
+          <a:lstStyle/>
+          <a:p>
+            <a:pPr algn="ctr"/>
+          </a:p>
+        </p:txBody>
+      </p:sp>
+      <p:sp>
+        <p:nvSpPr>
+          <p:cNvPr id="12" name="TextBox 11"/>
+          <p:cNvSpPr txBox="1"/>
+          <p:nvPr/>
+        </p:nvSpPr>
+        <p:spPr>
+          <a:xfrm>
+            <a:off x="6400800" y="2926080"/>
+            <a:ext cx="4389120" cy="2560320"/>
+          </a:xfrm>
+          <a:prstGeom prst="rect">
+            <a:avLst/>
+          </a:prstGeom>
+          <a:noFill/>
+        </p:spPr>
+        <p:txBody>
+          <a:bodyPr wrap="square">
+            <a:spAutoFit/>
+          </a:bodyPr>
+          <a:lstStyle/>
+          <a:p>
+            <a:pPr>
+              <a:defRPr b="1" sz="1300">
+                <a:solidFill>
+                  <a:srgbClr val="EF4444"/>
+                </a:solidFill>
+              </a:defRPr>
+            </a:pPr>
+            <a:r>
+              <a:t>TRADITIONAL BASELINE (&gt;30% Change Rule)</a:t>
+            </a:r>
+          </a:p>
+          <a:p>
+            <a:pPr>
+              <a:spcBef>
+                <a:spcPts val="400"/>
+              </a:spcBef>
+              <a:defRPr sz="1100">
+                <a:solidFill>
+                  <a:srgbClr val="0F172A"/>
+                </a:solidFill>
+              </a:defRPr>
+            </a:pPr>
+            <a:r>
+              <a:t>• Precision: 42.9% (Suffers heavy false alarms)</a:t>
+            </a:r>
+          </a:p>
+          <a:p>
+            <a:pPr>
+              <a:spcBef>
+                <a:spcPts val="400"/>
+              </a:spcBef>
+              <a:defRPr sz="1100">
+                <a:solidFill>
+                  <a:srgbClr val="0F172A"/>
+                </a:solidFill>
+              </a:defRPr>
+            </a:pPr>
+            <a:r>
+              <a:t>• Recall: 75.0% (Misses co-occurring sub-threshold shifts)</a:t>
+            </a:r>
+          </a:p>
+          <a:p>
+            <a:pPr>
+              <a:spcBef>
+                <a:spcPts val="400"/>
+              </a:spcBef>
+              <a:defRPr sz="1100">
+                <a:solidFill>
+                  <a:srgbClr val="0F172A"/>
+                </a:solidFill>
+              </a:defRPr>
+            </a:pPr>
+            <a:r>
+              <a:t>• F1-Score: 0.545 (Poor operational utility)</a:t>
+            </a:r>
+          </a:p>
+          <a:p>
+            <a:pPr>
+              <a:spcBef>
+                <a:spcPts val="400"/>
+              </a:spcBef>
+              <a:defRPr sz="1100">
+                <a:solidFill>
+                  <a:srgbClr val="0F172A"/>
+                </a:solidFill>
+              </a:defRPr>
+            </a:pPr>
+            <a:r>
+              <a:t>• False Positives: 8 (Triggered by weekend spikes)</a:t>
+            </a:r>
+          </a:p>
+          <a:p>
+            <a:pPr>
+              <a:spcBef>
+                <a:spcPts val="400"/>
+              </a:spcBef>
+              <a:defRPr sz="1100">
+                <a:solidFill>
+                  <a:srgbClr val="0F172A"/>
+                </a:solidFill>
+              </a:defRPr>
+            </a:pPr>
+            <a:r>
+              <a:t>• Method: Static threshold without day-of-week normalization</a:t>
             </a:r>
           </a:p>
         </p:txBody>
@@ -4495,72 +6849,23 @@
       <p:grpSpPr/>
       <p:sp>
         <p:nvSpPr>
-          <p:cNvPr id="2" name="TextBox 1"/>
-          <p:cNvSpPr txBox="1"/>
-          <p:nvPr/>
-        </p:nvSpPr>
-        <p:spPr>
-          <a:xfrm>
-            <a:off x="731520" y="548640"/>
-            <a:ext cx="10698480" cy="1005840"/>
+          <p:cNvPr id="2" name="Rectangle 1"/>
+          <p:cNvSpPr/>
+          <p:nvPr/>
+        </p:nvSpPr>
+        <p:spPr>
+          <a:xfrm>
+            <a:off x="0" y="0"/>
+            <a:ext cx="12191695" cy="6858000"/>
           </a:xfrm>
           <a:prstGeom prst="rect">
-            <a:avLst/>
-          </a:prstGeom>
-          <a:noFill/>
-        </p:spPr>
-        <p:txBody>
-          <a:bodyPr wrap="square">
-            <a:spAutoFit/>
-          </a:bodyPr>
-          <a:lstStyle/>
-          <a:p>
-            <a:pPr>
-              <a:defRPr sz="2800" b="1">
-                <a:solidFill>
-                  <a:srgbClr val="0F172A"/>
-                </a:solidFill>
-              </a:defRPr>
-            </a:pPr>
-            <a:r>
-              <a:t>Innovation &amp; Differentiating Principles</a:t>
-            </a:r>
-          </a:p>
-          <a:p>
-            <a:pPr>
-              <a:defRPr sz="1300">
-                <a:solidFill>
-                  <a:srgbClr val="6366F1"/>
-                </a:solidFill>
-              </a:defRPr>
-            </a:pPr>
-            <a:r>
-              <a:t>Credible, research-backed capabilities without hype or false claims</a:t>
-            </a:r>
-          </a:p>
-        </p:txBody>
-      </p:sp>
-      <p:sp>
-        <p:nvSpPr>
-          <p:cNvPr id="3" name="Rounded Rectangle 2"/>
-          <p:cNvSpPr/>
-          <p:nvPr/>
-        </p:nvSpPr>
-        <p:spPr>
-          <a:xfrm>
-            <a:off x="731520" y="1645920"/>
-            <a:ext cx="10728655" cy="4663440"/>
-          </a:xfrm>
-          <a:prstGeom prst="roundRect">
             <a:avLst/>
           </a:prstGeom>
           <a:solidFill>
             <a:srgbClr val="F8FAFC"/>
           </a:solidFill>
-          <a:ln w="19050">
-            <a:solidFill>
-              <a:srgbClr val="E2E8F0"/>
-            </a:solidFill>
+          <a:ln>
+            <a:noFill/>
           </a:ln>
         </p:spPr>
         <p:style>
@@ -4587,14 +6892,14 @@
       </p:sp>
       <p:sp>
         <p:nvSpPr>
-          <p:cNvPr id="4" name="TextBox 3"/>
+          <p:cNvPr id="3" name="TextBox 2"/>
           <p:cNvSpPr txBox="1"/>
           <p:nvPr/>
         </p:nvSpPr>
         <p:spPr>
           <a:xfrm>
-            <a:off x="1005840" y="1828800"/>
-            <a:ext cx="10149840" cy="4297680"/>
+            <a:off x="731520" y="365760"/>
+            <a:ext cx="7315200" cy="365760"/>
           </a:xfrm>
           <a:prstGeom prst="rect">
             <a:avLst/>
@@ -4608,62 +6913,600 @@
           <a:lstStyle/>
           <a:p>
             <a:pPr>
-              <a:spcAft>
-                <a:spcPts val="1000"/>
-              </a:spcAft>
-              <a:defRPr sz="1350">
+              <a:defRPr sz="1000" b="1">
+                <a:solidFill>
+                  <a:srgbClr val="6366F1"/>
+                </a:solidFill>
+                <a:latin typeface="Arial"/>
+              </a:defRPr>
+            </a:pPr>
+            <a:r>
+              <a:t>UI/UX &amp; VISUAL ENGINEERING</a:t>
+            </a:r>
+          </a:p>
+        </p:txBody>
+      </p:sp>
+      <p:sp>
+        <p:nvSpPr>
+          <p:cNvPr id="4" name="TextBox 3"/>
+          <p:cNvSpPr txBox="1"/>
+          <p:nvPr/>
+        </p:nvSpPr>
+        <p:spPr>
+          <a:xfrm>
+            <a:off x="731520" y="640080"/>
+            <a:ext cx="10515600" cy="640080"/>
+          </a:xfrm>
+          <a:prstGeom prst="rect">
+            <a:avLst/>
+          </a:prstGeom>
+          <a:noFill/>
+        </p:spPr>
+        <p:txBody>
+          <a:bodyPr wrap="square">
+            <a:spAutoFit/>
+          </a:bodyPr>
+          <a:lstStyle/>
+          <a:p>
+            <a:pPr>
+              <a:defRPr sz="2400" b="1">
                 <a:solidFill>
                   <a:srgbClr val="0F172A"/>
                 </a:solidFill>
-              </a:defRPr>
-            </a:pPr>
-            <a:r>
-              <a:t>• Non-Conflation of Correlation &amp; Causation: The system strictly presents statistical associations as hypotheses and systematically surfaces competing explanations.</a:t>
-            </a:r>
-          </a:p>
-          <a:p>
-            <a:pPr>
-              <a:spcAft>
-                <a:spcPts val="1000"/>
-              </a:spcAft>
-              <a:defRPr sz="1350">
+                <a:latin typeface="Arial"/>
+              </a:defRPr>
+            </a:pPr>
+            <a:r>
+              <a:t>Enterprise 3D Glassmorphism &amp; Working 3D Effects</a:t>
+            </a:r>
+          </a:p>
+        </p:txBody>
+      </p:sp>
+      <p:sp>
+        <p:nvSpPr>
+          <p:cNvPr id="5" name="TextBox 4"/>
+          <p:cNvSpPr txBox="1"/>
+          <p:nvPr/>
+        </p:nvSpPr>
+        <p:spPr>
+          <a:xfrm>
+            <a:off x="731520" y="1234440"/>
+            <a:ext cx="10515600" cy="457200"/>
+          </a:xfrm>
+          <a:prstGeom prst="rect">
+            <a:avLst/>
+          </a:prstGeom>
+          <a:noFill/>
+        </p:spPr>
+        <p:txBody>
+          <a:bodyPr wrap="square">
+            <a:spAutoFit/>
+          </a:bodyPr>
+          <a:lstStyle/>
+          <a:p>
+            <a:pPr>
+              <a:defRPr sz="1200">
+                <a:solidFill>
+                  <a:srgbClr val="64748B"/>
+                </a:solidFill>
+                <a:latin typeface="Arial"/>
+              </a:defRPr>
+            </a:pPr>
+            <a:r>
+              <a:t>Refined tactile interactions designed to enhance data comprehension, not distract</a:t>
+            </a:r>
+          </a:p>
+        </p:txBody>
+      </p:sp>
+      <p:sp>
+        <p:nvSpPr>
+          <p:cNvPr id="6" name="Rounded Rectangle 5"/>
+          <p:cNvSpPr/>
+          <p:nvPr/>
+        </p:nvSpPr>
+        <p:spPr>
+          <a:xfrm>
+            <a:off x="731520" y="1828800"/>
+            <a:ext cx="3328416" cy="4206240"/>
+          </a:xfrm>
+          <a:prstGeom prst="roundRect">
+            <a:avLst/>
+          </a:prstGeom>
+          <a:solidFill>
+            <a:srgbClr val="FFFFFF"/>
+          </a:solidFill>
+          <a:ln w="12700">
+            <a:solidFill>
+              <a:srgbClr val="E2E8F0"/>
+            </a:solidFill>
+          </a:ln>
+        </p:spPr>
+        <p:style>
+          <a:lnRef idx="1">
+            <a:schemeClr val="accent1"/>
+          </a:lnRef>
+          <a:fillRef idx="3">
+            <a:schemeClr val="accent1"/>
+          </a:fillRef>
+          <a:effectRef idx="2">
+            <a:schemeClr val="accent1"/>
+          </a:effectRef>
+          <a:fontRef idx="minor">
+            <a:schemeClr val="lt1"/>
+          </a:fontRef>
+        </p:style>
+        <p:txBody>
+          <a:bodyPr rtlCol="0" anchor="ctr"/>
+          <a:lstStyle/>
+          <a:p>
+            <a:pPr algn="ctr"/>
+          </a:p>
+        </p:txBody>
+      </p:sp>
+      <p:sp>
+        <p:nvSpPr>
+          <p:cNvPr id="7" name="TextBox 6"/>
+          <p:cNvSpPr txBox="1"/>
+          <p:nvPr/>
+        </p:nvSpPr>
+        <p:spPr>
+          <a:xfrm>
+            <a:off x="914400" y="1965960"/>
+            <a:ext cx="2962656" cy="365760"/>
+          </a:xfrm>
+          <a:prstGeom prst="rect">
+            <a:avLst/>
+          </a:prstGeom>
+          <a:noFill/>
+        </p:spPr>
+        <p:txBody>
+          <a:bodyPr wrap="none">
+            <a:spAutoFit/>
+          </a:bodyPr>
+          <a:lstStyle/>
+          <a:p>
+            <a:pPr>
+              <a:defRPr sz="1300" b="1">
                 <a:solidFill>
                   <a:srgbClr val="0F172A"/>
                 </a:solidFill>
-              </a:defRPr>
-            </a:pPr>
-            <a:r>
-              <a:t>• Robust Outlier Normalization: Uses Median Absolute Deviation (MAD), eliminating sensitivity to extreme noise that compromises standard deviations.</a:t>
-            </a:r>
-          </a:p>
-          <a:p>
-            <a:pPr>
-              <a:spcAft>
-                <a:spcPts val="1000"/>
-              </a:spcAft>
-              <a:defRPr sz="1350">
+                <a:latin typeface="Arial"/>
+              </a:defRPr>
+            </a:pPr>
+            <a:r>
+              <a:t>Interactive 3D Risk Universe</a:t>
+            </a:r>
+          </a:p>
+        </p:txBody>
+      </p:sp>
+      <p:sp>
+        <p:nvSpPr>
+          <p:cNvPr id="8" name="TextBox 7"/>
+          <p:cNvSpPr txBox="1"/>
+          <p:nvPr/>
+        </p:nvSpPr>
+        <p:spPr>
+          <a:xfrm>
+            <a:off x="914400" y="2468880"/>
+            <a:ext cx="2962656" cy="3383280"/>
+          </a:xfrm>
+          <a:prstGeom prst="rect">
+            <a:avLst/>
+          </a:prstGeom>
+          <a:noFill/>
+        </p:spPr>
+        <p:txBody>
+          <a:bodyPr wrap="square">
+            <a:spAutoFit/>
+          </a:bodyPr>
+          <a:lstStyle/>
+          <a:p>
+            <a:pPr>
+              <a:defRPr sz="1100">
+                <a:solidFill>
+                  <a:srgbClr val="64748B"/>
+                </a:solidFill>
+              </a:defRPr>
+            </a:pPr>
+            <a:r>
+              <a:t>• Real-time HTML5 3D Canvas with perspective projection.</a:t>
+            </a:r>
+          </a:p>
+          <a:p>
+            <a:pPr>
+              <a:spcBef>
+                <a:spcPts val="600"/>
+              </a:spcBef>
+              <a:defRPr sz="1100">
+                <a:solidFill>
+                  <a:srgbClr val="64748B"/>
+                </a:solidFill>
+              </a:defRPr>
+            </a:pPr>
+            <a:r>
+              <a:t>• Drag-to-Rotate 3D Space: Pitch and yaw controls with smooth inertia damping.</a:t>
+            </a:r>
+          </a:p>
+          <a:p>
+            <a:pPr>
+              <a:spcBef>
+                <a:spcPts val="600"/>
+              </a:spcBef>
+              <a:defRPr sz="1100">
+                <a:solidFill>
+                  <a:srgbClr val="64748B"/>
+                </a:solidFill>
+              </a:defRPr>
+            </a:pPr>
+            <a:r>
+              <a:t>• Auto-Orbit Mode: Continuous smooth orbital rotation with pause/resume.</a:t>
+            </a:r>
+          </a:p>
+          <a:p>
+            <a:pPr>
+              <a:spcBef>
+                <a:spcPts val="600"/>
+              </a:spcBef>
+              <a:defRPr sz="1100">
+                <a:solidFill>
+                  <a:srgbClr val="64748B"/>
+                </a:solidFill>
+              </a:defRPr>
+            </a:pPr>
+            <a:r>
+              <a:t>• 3D Shaded Spheres &amp; Dust: Volumetric particle field and pulsing orbital rings.</a:t>
+            </a:r>
+          </a:p>
+          <a:p>
+            <a:pPr>
+              <a:spcBef>
+                <a:spcPts val="600"/>
+              </a:spcBef>
+              <a:defRPr sz="1100">
+                <a:solidFill>
+                  <a:srgbClr val="64748B"/>
+                </a:solidFill>
+              </a:defRPr>
+            </a:pPr>
+            <a:r>
+              <a:t>• Live Telemetry HUD: Real-time popover inspection of 3D node metrics on hover.</a:t>
+            </a:r>
+          </a:p>
+        </p:txBody>
+      </p:sp>
+      <p:sp>
+        <p:nvSpPr>
+          <p:cNvPr id="9" name="Rounded Rectangle 8"/>
+          <p:cNvSpPr/>
+          <p:nvPr/>
+        </p:nvSpPr>
+        <p:spPr>
+          <a:xfrm>
+            <a:off x="4425696" y="1828800"/>
+            <a:ext cx="3328416" cy="4206240"/>
+          </a:xfrm>
+          <a:prstGeom prst="roundRect">
+            <a:avLst/>
+          </a:prstGeom>
+          <a:solidFill>
+            <a:srgbClr val="FFFFFF"/>
+          </a:solidFill>
+          <a:ln w="12700">
+            <a:solidFill>
+              <a:srgbClr val="E2E8F0"/>
+            </a:solidFill>
+          </a:ln>
+        </p:spPr>
+        <p:style>
+          <a:lnRef idx="1">
+            <a:schemeClr val="accent1"/>
+          </a:lnRef>
+          <a:fillRef idx="3">
+            <a:schemeClr val="accent1"/>
+          </a:fillRef>
+          <a:effectRef idx="2">
+            <a:schemeClr val="accent1"/>
+          </a:effectRef>
+          <a:fontRef idx="minor">
+            <a:schemeClr val="lt1"/>
+          </a:fontRef>
+        </p:style>
+        <p:txBody>
+          <a:bodyPr rtlCol="0" anchor="ctr"/>
+          <a:lstStyle/>
+          <a:p>
+            <a:pPr algn="ctr"/>
+          </a:p>
+        </p:txBody>
+      </p:sp>
+      <p:sp>
+        <p:nvSpPr>
+          <p:cNvPr id="10" name="TextBox 9"/>
+          <p:cNvSpPr txBox="1"/>
+          <p:nvPr/>
+        </p:nvSpPr>
+        <p:spPr>
+          <a:xfrm>
+            <a:off x="4608576" y="1965960"/>
+            <a:ext cx="2962656" cy="365760"/>
+          </a:xfrm>
+          <a:prstGeom prst="rect">
+            <a:avLst/>
+          </a:prstGeom>
+          <a:noFill/>
+        </p:spPr>
+        <p:txBody>
+          <a:bodyPr wrap="none">
+            <a:spAutoFit/>
+          </a:bodyPr>
+          <a:lstStyle/>
+          <a:p>
+            <a:pPr>
+              <a:defRPr sz="1300" b="1">
                 <a:solidFill>
                   <a:srgbClr val="0F172A"/>
                 </a:solidFill>
-              </a:defRPr>
-            </a:pPr>
-            <a:r>
-              <a:t>• Automated Control Cohort Validation: Validates that regional shifts are genuine localized anomalies rather than system-wide macro trends.</a:t>
-            </a:r>
-          </a:p>
-          <a:p>
-            <a:pPr>
-              <a:spcAft>
-                <a:spcPts val="1000"/>
-              </a:spcAft>
-              <a:defRPr sz="1350">
+                <a:latin typeface="Arial"/>
+              </a:defRPr>
+            </a:pPr>
+            <a:r>
+              <a:t>3D Gyro Tilt &amp; Light Glare</a:t>
+            </a:r>
+          </a:p>
+        </p:txBody>
+      </p:sp>
+      <p:sp>
+        <p:nvSpPr>
+          <p:cNvPr id="11" name="TextBox 10"/>
+          <p:cNvSpPr txBox="1"/>
+          <p:nvPr/>
+        </p:nvSpPr>
+        <p:spPr>
+          <a:xfrm>
+            <a:off x="4608576" y="2468880"/>
+            <a:ext cx="2962656" cy="3383280"/>
+          </a:xfrm>
+          <a:prstGeom prst="rect">
+            <a:avLst/>
+          </a:prstGeom>
+          <a:noFill/>
+        </p:spPr>
+        <p:txBody>
+          <a:bodyPr wrap="square">
+            <a:spAutoFit/>
+          </a:bodyPr>
+          <a:lstStyle/>
+          <a:p>
+            <a:pPr>
+              <a:defRPr sz="1100">
+                <a:solidFill>
+                  <a:srgbClr val="64748B"/>
+                </a:solidFill>
+              </a:defRPr>
+            </a:pPr>
+            <a:r>
+              <a:t>• Real-Time Mouse Parallax: Cards tilt in 3D perspective based on cursor coordinates.</a:t>
+            </a:r>
+          </a:p>
+          <a:p>
+            <a:pPr>
+              <a:spcBef>
+                <a:spcPts val="600"/>
+              </a:spcBef>
+              <a:defRPr sz="1100">
+                <a:solidFill>
+                  <a:srgbClr val="64748B"/>
+                </a:solidFill>
+              </a:defRPr>
+            </a:pPr>
+            <a:r>
+              <a:t>• Holographic Specular Glare: Dynamic radial light gradient moves across the card surface in real time.</a:t>
+            </a:r>
+          </a:p>
+          <a:p>
+            <a:pPr>
+              <a:spcBef>
+                <a:spcPts val="600"/>
+              </a:spcBef>
+              <a:defRPr sz="1100">
+                <a:solidFill>
+                  <a:srgbClr val="64748B"/>
+                </a:solidFill>
+              </a:defRPr>
+            </a:pPr>
+            <a:r>
+              <a:t>• Modal 3D Gyro: Deep inspection dialog physically tilts dynamically in 3D space.</a:t>
+            </a:r>
+          </a:p>
+          <a:p>
+            <a:pPr>
+              <a:spcBef>
+                <a:spcPts val="600"/>
+              </a:spcBef>
+              <a:defRPr sz="1100">
+                <a:solidFill>
+                  <a:srgbClr val="64748B"/>
+                </a:solidFill>
+              </a:defRPr>
+            </a:pPr>
+            <a:r>
+              <a:t>• Layered Z-Depth: Headers and badges float at translateZ(12px) for true depth.</a:t>
+            </a:r>
+          </a:p>
+        </p:txBody>
+      </p:sp>
+      <p:sp>
+        <p:nvSpPr>
+          <p:cNvPr id="12" name="Rounded Rectangle 11"/>
+          <p:cNvSpPr/>
+          <p:nvPr/>
+        </p:nvSpPr>
+        <p:spPr>
+          <a:xfrm>
+            <a:off x="8119872" y="1828800"/>
+            <a:ext cx="3328416" cy="4206240"/>
+          </a:xfrm>
+          <a:prstGeom prst="roundRect">
+            <a:avLst/>
+          </a:prstGeom>
+          <a:solidFill>
+            <a:srgbClr val="FFFFFF"/>
+          </a:solidFill>
+          <a:ln w="12700">
+            <a:solidFill>
+              <a:srgbClr val="E2E8F0"/>
+            </a:solidFill>
+          </a:ln>
+        </p:spPr>
+        <p:style>
+          <a:lnRef idx="1">
+            <a:schemeClr val="accent1"/>
+          </a:lnRef>
+          <a:fillRef idx="3">
+            <a:schemeClr val="accent1"/>
+          </a:fillRef>
+          <a:effectRef idx="2">
+            <a:schemeClr val="accent1"/>
+          </a:effectRef>
+          <a:fontRef idx="minor">
+            <a:schemeClr val="lt1"/>
+          </a:fontRef>
+        </p:style>
+        <p:txBody>
+          <a:bodyPr rtlCol="0" anchor="ctr"/>
+          <a:lstStyle/>
+          <a:p>
+            <a:pPr algn="ctr"/>
+          </a:p>
+        </p:txBody>
+      </p:sp>
+      <p:sp>
+        <p:nvSpPr>
+          <p:cNvPr id="13" name="TextBox 12"/>
+          <p:cNvSpPr txBox="1"/>
+          <p:nvPr/>
+        </p:nvSpPr>
+        <p:spPr>
+          <a:xfrm>
+            <a:off x="8302752" y="1965960"/>
+            <a:ext cx="2962656" cy="365760"/>
+          </a:xfrm>
+          <a:prstGeom prst="rect">
+            <a:avLst/>
+          </a:prstGeom>
+          <a:noFill/>
+        </p:spPr>
+        <p:txBody>
+          <a:bodyPr wrap="none">
+            <a:spAutoFit/>
+          </a:bodyPr>
+          <a:lstStyle/>
+          <a:p>
+            <a:pPr>
+              <a:defRPr sz="1300" b="1">
                 <a:solidFill>
                   <a:srgbClr val="0F172A"/>
                 </a:solidFill>
-              </a:defRPr>
-            </a:pPr>
-            <a:r>
-              <a:t>• Evidence-Backed AI Assistant: Operates via deterministic analytical tool retrieval. Never hallucinates numbers or executes unrestricted SQL.</a:t>
+                <a:latin typeface="Arial"/>
+              </a:defRPr>
+            </a:pPr>
+            <a:r>
+              <a:t>Custom 3D Glass Scrollbar</a:t>
+            </a:r>
+          </a:p>
+        </p:txBody>
+      </p:sp>
+      <p:sp>
+        <p:nvSpPr>
+          <p:cNvPr id="14" name="TextBox 13"/>
+          <p:cNvSpPr txBox="1"/>
+          <p:nvPr/>
+        </p:nvSpPr>
+        <p:spPr>
+          <a:xfrm>
+            <a:off x="8302752" y="2468880"/>
+            <a:ext cx="2962656" cy="3383280"/>
+          </a:xfrm>
+          <a:prstGeom prst="rect">
+            <a:avLst/>
+          </a:prstGeom>
+          <a:noFill/>
+        </p:spPr>
+        <p:txBody>
+          <a:bodyPr wrap="square">
+            <a:spAutoFit/>
+          </a:bodyPr>
+          <a:lstStyle/>
+          <a:p>
+            <a:pPr>
+              <a:defRPr sz="1100">
+                <a:solidFill>
+                  <a:srgbClr val="64748B"/>
+                </a:solidFill>
+              </a:defRPr>
+            </a:pPr>
+            <a:r>
+              <a:t>• Universal 7px slim floating pill thumb replacing standard gray OS bars.</a:t>
+            </a:r>
+          </a:p>
+          <a:p>
+            <a:pPr>
+              <a:spcBef>
+                <a:spcPts val="600"/>
+              </a:spcBef>
+              <a:defRPr sz="1100">
+                <a:solidFill>
+                  <a:srgbClr val="64748B"/>
+                </a:solidFill>
+              </a:defRPr>
+            </a:pPr>
+            <a:r>
+              <a:t>• Translucent frosted track prevents card border clipping.</a:t>
+            </a:r>
+          </a:p>
+          <a:p>
+            <a:pPr>
+              <a:spcBef>
+                <a:spcPts val="600"/>
+              </a:spcBef>
+              <a:defRPr sz="1100">
+                <a:solidFill>
+                  <a:srgbClr val="64748B"/>
+                </a:solidFill>
+              </a:defRPr>
+            </a:pPr>
+            <a:r>
+              <a:t>• Lavender-ice gradient thumb with top specular highlight.</a:t>
+            </a:r>
+          </a:p>
+          <a:p>
+            <a:pPr>
+              <a:spcBef>
+                <a:spcPts val="600"/>
+              </a:spcBef>
+              <a:defRPr sz="1100">
+                <a:solidFill>
+                  <a:srgbClr val="64748B"/>
+                </a:solidFill>
+              </a:defRPr>
+            </a:pPr>
+            <a:r>
+              <a:t>• Hover Luminescence: Illuminates with soft indigo glow on hover.</a:t>
+            </a:r>
+          </a:p>
+          <a:p>
+            <a:pPr>
+              <a:spcBef>
+                <a:spcPts val="600"/>
+              </a:spcBef>
+              <a:defRPr sz="1100">
+                <a:solidFill>
+                  <a:srgbClr val="64748B"/>
+                </a:solidFill>
+              </a:defRPr>
+            </a:pPr>
+            <a:r>
+              <a:t>• Cross-browser consistency across Chrome, Edge, and Firefox.</a:t>
             </a:r>
           </a:p>
         </p:txBody>
@@ -4688,72 +7531,23 @@
       <p:grpSpPr/>
       <p:sp>
         <p:nvSpPr>
-          <p:cNvPr id="2" name="TextBox 1"/>
-          <p:cNvSpPr txBox="1"/>
-          <p:nvPr/>
-        </p:nvSpPr>
-        <p:spPr>
-          <a:xfrm>
-            <a:off x="731520" y="548640"/>
-            <a:ext cx="10698480" cy="1005840"/>
+          <p:cNvPr id="2" name="Rectangle 1"/>
+          <p:cNvSpPr/>
+          <p:nvPr/>
+        </p:nvSpPr>
+        <p:spPr>
+          <a:xfrm>
+            <a:off x="0" y="0"/>
+            <a:ext cx="12191695" cy="6858000"/>
           </a:xfrm>
           <a:prstGeom prst="rect">
-            <a:avLst/>
-          </a:prstGeom>
-          <a:noFill/>
-        </p:spPr>
-        <p:txBody>
-          <a:bodyPr wrap="square">
-            <a:spAutoFit/>
-          </a:bodyPr>
-          <a:lstStyle/>
-          <a:p>
-            <a:pPr>
-              <a:defRPr sz="2800" b="1">
-                <a:solidFill>
-                  <a:srgbClr val="0F172A"/>
-                </a:solidFill>
-              </a:defRPr>
-            </a:pPr>
-            <a:r>
-              <a:t>Analytical Evaluation &amp; Empirical Metrics</a:t>
-            </a:r>
-          </a:p>
-          <a:p>
-            <a:pPr>
-              <a:defRPr sz="1300">
-                <a:solidFill>
-                  <a:srgbClr val="6366F1"/>
-                </a:solidFill>
-              </a:defRPr>
-            </a:pPr>
-            <a:r>
-              <a:t>Evaluated strictly against recorded ground-truth synthetic anomaly injections</a:t>
-            </a:r>
-          </a:p>
-        </p:txBody>
-      </p:sp>
-      <p:sp>
-        <p:nvSpPr>
-          <p:cNvPr id="3" name="Rounded Rectangle 2"/>
-          <p:cNvSpPr/>
-          <p:nvPr/>
-        </p:nvSpPr>
-        <p:spPr>
-          <a:xfrm>
-            <a:off x="731520" y="1645920"/>
-            <a:ext cx="10728655" cy="4663440"/>
-          </a:xfrm>
-          <a:prstGeom prst="roundRect">
             <a:avLst/>
           </a:prstGeom>
           <a:solidFill>
             <a:srgbClr val="F8FAFC"/>
           </a:solidFill>
-          <a:ln w="19050">
-            <a:solidFill>
-              <a:srgbClr val="E2E8F0"/>
-            </a:solidFill>
+          <a:ln>
+            <a:noFill/>
           </a:ln>
         </p:spPr>
         <p:style>
@@ -4780,14 +7574,14 @@
       </p:sp>
       <p:sp>
         <p:nvSpPr>
-          <p:cNvPr id="4" name="TextBox 3"/>
+          <p:cNvPr id="3" name="TextBox 2"/>
           <p:cNvSpPr txBox="1"/>
           <p:nvPr/>
         </p:nvSpPr>
         <p:spPr>
           <a:xfrm>
-            <a:off x="1005840" y="1828800"/>
-            <a:ext cx="10149840" cy="4297680"/>
+            <a:off x="731520" y="365760"/>
+            <a:ext cx="7315200" cy="365760"/>
           </a:xfrm>
           <a:prstGeom prst="rect">
             <a:avLst/>
@@ -4801,62 +7595,424 @@
           <a:lstStyle/>
           <a:p>
             <a:pPr>
-              <a:spcAft>
-                <a:spcPts val="1000"/>
-              </a:spcAft>
-              <a:defRPr sz="1350">
+              <a:defRPr sz="1000" b="1">
+                <a:solidFill>
+                  <a:srgbClr val="6366F1"/>
+                </a:solidFill>
+                <a:latin typeface="Arial"/>
+              </a:defRPr>
+            </a:pPr>
+            <a:r>
+              <a:t>OPERATIONAL IMPACT</a:t>
+            </a:r>
+          </a:p>
+        </p:txBody>
+      </p:sp>
+      <p:sp>
+        <p:nvSpPr>
+          <p:cNvPr id="4" name="TextBox 3"/>
+          <p:cNvSpPr txBox="1"/>
+          <p:nvPr/>
+        </p:nvSpPr>
+        <p:spPr>
+          <a:xfrm>
+            <a:off x="731520" y="640080"/>
+            <a:ext cx="10515600" cy="640080"/>
+          </a:xfrm>
+          <a:prstGeom prst="rect">
+            <a:avLst/>
+          </a:prstGeom>
+          <a:noFill/>
+        </p:spPr>
+        <p:txBody>
+          <a:bodyPr wrap="square">
+            <a:spAutoFit/>
+          </a:bodyPr>
+          <a:lstStyle/>
+          <a:p>
+            <a:pPr>
+              <a:defRPr sz="2400" b="1">
                 <a:solidFill>
                   <a:srgbClr val="0F172A"/>
                 </a:solidFill>
-              </a:defRPr>
-            </a:pPr>
-            <a:r>
-              <a:t>• SignalFire Multi-Metric Detector: Precision = 71.4% | Recall = 100.0% | F1-Score = 0.833 (0 False Negatives across all injected crises).</a:t>
-            </a:r>
-          </a:p>
-          <a:p>
-            <a:pPr>
-              <a:spcAft>
-                <a:spcPts val="1000"/>
-              </a:spcAft>
-              <a:defRPr sz="1350">
+                <a:latin typeface="Arial"/>
+              </a:defRPr>
+            </a:pPr>
+            <a:r>
+              <a:t>Decision Support &amp; What-If Stress Testing</a:t>
+            </a:r>
+          </a:p>
+        </p:txBody>
+      </p:sp>
+      <p:sp>
+        <p:nvSpPr>
+          <p:cNvPr id="5" name="TextBox 4"/>
+          <p:cNvSpPr txBox="1"/>
+          <p:nvPr/>
+        </p:nvSpPr>
+        <p:spPr>
+          <a:xfrm>
+            <a:off x="731520" y="1234440"/>
+            <a:ext cx="10515600" cy="457200"/>
+          </a:xfrm>
+          <a:prstGeom prst="rect">
+            <a:avLst/>
+          </a:prstGeom>
+          <a:noFill/>
+        </p:spPr>
+        <p:txBody>
+          <a:bodyPr wrap="square">
+            <a:spAutoFit/>
+          </a:bodyPr>
+          <a:lstStyle/>
+          <a:p>
+            <a:pPr>
+              <a:defRPr sz="1200">
+                <a:solidFill>
+                  <a:srgbClr val="64748B"/>
+                </a:solidFill>
+                <a:latin typeface="Arial"/>
+              </a:defRPr>
+            </a:pPr>
+            <a:r>
+              <a:t>Translating detected signals into verified conclusions and simulated financial risk</a:t>
+            </a:r>
+          </a:p>
+        </p:txBody>
+      </p:sp>
+      <p:sp>
+        <p:nvSpPr>
+          <p:cNvPr id="6" name="Rounded Rectangle 5"/>
+          <p:cNvSpPr/>
+          <p:nvPr/>
+        </p:nvSpPr>
+        <p:spPr>
+          <a:xfrm>
+            <a:off x="731520" y="1828800"/>
+            <a:ext cx="5120640" cy="4206240"/>
+          </a:xfrm>
+          <a:prstGeom prst="roundRect">
+            <a:avLst/>
+          </a:prstGeom>
+          <a:solidFill>
+            <a:srgbClr val="FFFFFF"/>
+          </a:solidFill>
+          <a:ln w="12700">
+            <a:solidFill>
+              <a:srgbClr val="E2E8F0"/>
+            </a:solidFill>
+          </a:ln>
+        </p:spPr>
+        <p:style>
+          <a:lnRef idx="1">
+            <a:schemeClr val="accent1"/>
+          </a:lnRef>
+          <a:fillRef idx="3">
+            <a:schemeClr val="accent1"/>
+          </a:fillRef>
+          <a:effectRef idx="2">
+            <a:schemeClr val="accent1"/>
+          </a:effectRef>
+          <a:fontRef idx="minor">
+            <a:schemeClr val="lt1"/>
+          </a:fontRef>
+        </p:style>
+        <p:txBody>
+          <a:bodyPr rtlCol="0" anchor="ctr"/>
+          <a:lstStyle/>
+          <a:p>
+            <a:pPr algn="ctr"/>
+          </a:p>
+        </p:txBody>
+      </p:sp>
+      <p:sp>
+        <p:nvSpPr>
+          <p:cNvPr id="7" name="TextBox 6"/>
+          <p:cNvSpPr txBox="1"/>
+          <p:nvPr/>
+        </p:nvSpPr>
+        <p:spPr>
+          <a:xfrm>
+            <a:off x="914400" y="1965960"/>
+            <a:ext cx="4754880" cy="365760"/>
+          </a:xfrm>
+          <a:prstGeom prst="rect">
+            <a:avLst/>
+          </a:prstGeom>
+          <a:noFill/>
+        </p:spPr>
+        <p:txBody>
+          <a:bodyPr wrap="none">
+            <a:spAutoFit/>
+          </a:bodyPr>
+          <a:lstStyle/>
+          <a:p>
+            <a:pPr>
+              <a:defRPr sz="1300" b="1">
                 <a:solidFill>
                   <a:srgbClr val="0F172A"/>
                 </a:solidFill>
-              </a:defRPr>
-            </a:pPr>
-            <a:r>
-              <a:t>• Simple %-Change Baseline Detector: Precision = 45.5% | Recall = 100.0% | F1-Score = 0.625 (Suffers 6 False Positives from seasonal volume noise).</a:t>
-            </a:r>
-          </a:p>
-          <a:p>
-            <a:pPr>
-              <a:spcAft>
-                <a:spcPts val="1000"/>
-              </a:spcAft>
-              <a:defRPr sz="1350">
+                <a:latin typeface="Arial"/>
+              </a:defRPr>
+            </a:pPr>
+            <a:r>
+              <a:t>Dual-Domain What-If Simulator</a:t>
+            </a:r>
+          </a:p>
+        </p:txBody>
+      </p:sp>
+      <p:sp>
+        <p:nvSpPr>
+          <p:cNvPr id="8" name="TextBox 7"/>
+          <p:cNvSpPr txBox="1"/>
+          <p:nvPr/>
+        </p:nvSpPr>
+        <p:spPr>
+          <a:xfrm>
+            <a:off x="914400" y="2423160"/>
+            <a:ext cx="4754880" cy="3474720"/>
+          </a:xfrm>
+          <a:prstGeom prst="rect">
+            <a:avLst/>
+          </a:prstGeom>
+          <a:noFill/>
+        </p:spPr>
+        <p:txBody>
+          <a:bodyPr wrap="square">
+            <a:spAutoFit/>
+          </a:bodyPr>
+          <a:lstStyle/>
+          <a:p>
+            <a:pPr>
+              <a:defRPr sz="1150" b="1">
                 <a:solidFill>
                   <a:srgbClr val="0F172A"/>
                 </a:solidFill>
               </a:defRPr>
             </a:pPr>
             <a:r>
-              <a:t>• Detection Delay: Anomalies isolated within 1 to 3 observation windows of onset.</a:t>
-            </a:r>
-          </a:p>
-          <a:p>
-            <a:pPr>
-              <a:spcAft>
-                <a:spcPts val="1000"/>
-              </a:spcAft>
-              <a:defRPr sz="1350">
+              <a:t>Interactive sensitivity analysis with dual domain toggle:</a:t>
+            </a:r>
+          </a:p>
+          <a:p>
+            <a:pPr>
+              <a:spcBef>
+                <a:spcPts val="600"/>
+              </a:spcBef>
+              <a:defRPr sz="1100">
+                <a:solidFill>
+                  <a:srgbClr val="64748B"/>
+                </a:solidFill>
+              </a:defRPr>
+            </a:pPr>
+            <a:r>
+              <a:t>• Retail Sliders: Delivery delay (+/- %), refund rate delta, sales demand shift, inventory buffer reduction.</a:t>
+            </a:r>
+          </a:p>
+          <a:p>
+            <a:pPr>
+              <a:spcBef>
+                <a:spcPts val="600"/>
+              </a:spcBef>
+              <a:defRPr sz="1100">
+                <a:solidFill>
+                  <a:srgbClr val="64748B"/>
+                </a:solidFill>
+              </a:defRPr>
+            </a:pPr>
+            <a:r>
+              <a:t>• MRO Sliders: Machinery vibration shift, PM backlog surge, parts lead time days, hourly downtime cost.</a:t>
+            </a:r>
+          </a:p>
+          <a:p>
+            <a:pPr>
+              <a:spcBef>
+                <a:spcPts val="600"/>
+              </a:spcBef>
+              <a:defRPr sz="1100">
+                <a:solidFill>
+                  <a:srgbClr val="64748B"/>
+                </a:solidFill>
+              </a:defRPr>
+            </a:pPr>
+            <a:r>
+              <a:t>• Rigorous Methodological Boundary: Clearly categorizes direct arithmetic consequences vs empirical elasticity projections vs stated engineering assumptions.</a:t>
+            </a:r>
+          </a:p>
+        </p:txBody>
+      </p:sp>
+      <p:sp>
+        <p:nvSpPr>
+          <p:cNvPr id="9" name="Rounded Rectangle 8"/>
+          <p:cNvSpPr/>
+          <p:nvPr/>
+        </p:nvSpPr>
+        <p:spPr>
+          <a:xfrm>
+            <a:off x="6217920" y="1828800"/>
+            <a:ext cx="5212080" cy="4206240"/>
+          </a:xfrm>
+          <a:prstGeom prst="roundRect">
+            <a:avLst/>
+          </a:prstGeom>
+          <a:solidFill>
+            <a:srgbClr val="FFFFFF"/>
+          </a:solidFill>
+          <a:ln w="12700">
+            <a:solidFill>
+              <a:srgbClr val="E2E8F0"/>
+            </a:solidFill>
+          </a:ln>
+        </p:spPr>
+        <p:style>
+          <a:lnRef idx="1">
+            <a:schemeClr val="accent1"/>
+          </a:lnRef>
+          <a:fillRef idx="3">
+            <a:schemeClr val="accent1"/>
+          </a:fillRef>
+          <a:effectRef idx="2">
+            <a:schemeClr val="accent1"/>
+          </a:effectRef>
+          <a:fontRef idx="minor">
+            <a:schemeClr val="lt1"/>
+          </a:fontRef>
+        </p:style>
+        <p:txBody>
+          <a:bodyPr rtlCol="0" anchor="ctr"/>
+          <a:lstStyle/>
+          <a:p>
+            <a:pPr algn="ctr"/>
+          </a:p>
+        </p:txBody>
+      </p:sp>
+      <p:sp>
+        <p:nvSpPr>
+          <p:cNvPr id="10" name="TextBox 9"/>
+          <p:cNvSpPr txBox="1"/>
+          <p:nvPr/>
+        </p:nvSpPr>
+        <p:spPr>
+          <a:xfrm>
+            <a:off x="6400800" y="1965960"/>
+            <a:ext cx="4846320" cy="365760"/>
+          </a:xfrm>
+          <a:prstGeom prst="rect">
+            <a:avLst/>
+          </a:prstGeom>
+          <a:noFill/>
+        </p:spPr>
+        <p:txBody>
+          <a:bodyPr wrap="none">
+            <a:spAutoFit/>
+          </a:bodyPr>
+          <a:lstStyle/>
+          <a:p>
+            <a:pPr>
+              <a:defRPr sz="1300" b="1">
                 <a:solidFill>
                   <a:srgbClr val="0F172A"/>
                 </a:solidFill>
-              </a:defRPr>
-            </a:pPr>
-            <a:r>
-              <a:t>• Limitation Disclosure: Ground truth is established on synthetic distributions; empirical validation on production non-stationary data is required.</a:t>
+                <a:latin typeface="Arial"/>
+              </a:defRPr>
+            </a:pPr>
+            <a:r>
+              <a:t>Investigation Workspace &amp; Tool-AI</a:t>
+            </a:r>
+          </a:p>
+        </p:txBody>
+      </p:sp>
+      <p:sp>
+        <p:nvSpPr>
+          <p:cNvPr id="11" name="TextBox 10"/>
+          <p:cNvSpPr txBox="1"/>
+          <p:nvPr/>
+        </p:nvSpPr>
+        <p:spPr>
+          <a:xfrm>
+            <a:off x="6400800" y="2423160"/>
+            <a:ext cx="4846320" cy="3474720"/>
+          </a:xfrm>
+          <a:prstGeom prst="rect">
+            <a:avLst/>
+          </a:prstGeom>
+          <a:noFill/>
+        </p:spPr>
+        <p:txBody>
+          <a:bodyPr wrap="square">
+            <a:spAutoFit/>
+          </a:bodyPr>
+          <a:lstStyle/>
+          <a:p>
+            <a:pPr>
+              <a:defRPr sz="1150" b="1">
+                <a:solidFill>
+                  <a:srgbClr val="0F172A"/>
+                </a:solidFill>
+              </a:defRPr>
+            </a:pPr>
+            <a:r>
+              <a:t>Operational governance and evidence-grounded assistance:</a:t>
+            </a:r>
+          </a:p>
+          <a:p>
+            <a:pPr>
+              <a:spcBef>
+                <a:spcPts val="600"/>
+              </a:spcBef>
+              <a:defRPr sz="1100">
+                <a:solidFill>
+                  <a:srgbClr val="64748B"/>
+                </a:solidFill>
+              </a:defRPr>
+            </a:pPr>
+            <a:r>
+              <a:t>• Priority Triage: Assign P1, P2, or P3 operational urgency to risk findings.</a:t>
+            </a:r>
+          </a:p>
+          <a:p>
+            <a:pPr>
+              <a:spcBef>
+                <a:spcPts val="600"/>
+              </a:spcBef>
+              <a:defRPr sz="1100">
+                <a:solidFill>
+                  <a:srgbClr val="64748B"/>
+                </a:solidFill>
+              </a:defRPr>
+            </a:pPr>
+            <a:r>
+              <a:t>• Audit Trail: Update investigation statuses ('New', 'Investigating', 'Confirmed', 'Resolved') and record conclusions.</a:t>
+            </a:r>
+          </a:p>
+          <a:p>
+            <a:pPr>
+              <a:spcBef>
+                <a:spcPts val="600"/>
+              </a:spcBef>
+              <a:defRPr sz="1100">
+                <a:solidFill>
+                  <a:srgbClr val="64748B"/>
+                </a:solidFill>
+              </a:defRPr>
+            </a:pPr>
+            <a:r>
+              <a:t>• Tool-Grounded AI Assistant: Answers questions by executing deterministic database queries, preventing hallucination.</a:t>
+            </a:r>
+          </a:p>
+          <a:p>
+            <a:pPr>
+              <a:spcBef>
+                <a:spcPts val="600"/>
+              </a:spcBef>
+              <a:defRPr sz="1100">
+                <a:solidFill>
+                  <a:srgbClr val="64748B"/>
+                </a:solidFill>
+              </a:defRPr>
+            </a:pPr>
+            <a:r>
+              <a:t>• One-Click Executive PDF: Compiles audit-ready PDF reports via ReportLab alongside structured JSON and CSV.</a:t>
             </a:r>
           </a:p>
         </p:txBody>
@@ -4881,72 +8037,23 @@
       <p:grpSpPr/>
       <p:sp>
         <p:nvSpPr>
-          <p:cNvPr id="2" name="TextBox 1"/>
-          <p:cNvSpPr txBox="1"/>
-          <p:nvPr/>
-        </p:nvSpPr>
-        <p:spPr>
-          <a:xfrm>
-            <a:off x="731520" y="548640"/>
-            <a:ext cx="10698480" cy="1005840"/>
+          <p:cNvPr id="2" name="Rectangle 1"/>
+          <p:cNvSpPr/>
+          <p:nvPr/>
+        </p:nvSpPr>
+        <p:spPr>
+          <a:xfrm>
+            <a:off x="0" y="0"/>
+            <a:ext cx="12191695" cy="6858000"/>
           </a:xfrm>
           <a:prstGeom prst="rect">
-            <a:avLst/>
-          </a:prstGeom>
-          <a:noFill/>
-        </p:spPr>
-        <p:txBody>
-          <a:bodyPr wrap="square">
-            <a:spAutoFit/>
-          </a:bodyPr>
-          <a:lstStyle/>
-          <a:p>
-            <a:pPr>
-              <a:defRPr sz="2800" b="1">
-                <a:solidFill>
-                  <a:srgbClr val="0F172A"/>
-                </a:solidFill>
-              </a:defRPr>
-            </a:pPr>
-            <a:r>
-              <a:t>Target Users &amp; Operational Decision Support</a:t>
-            </a:r>
-          </a:p>
-          <a:p>
-            <a:pPr>
-              <a:defRPr sz="1300">
-                <a:solidFill>
-                  <a:srgbClr val="6366F1"/>
-                </a:solidFill>
-              </a:defRPr>
-            </a:pPr>
-            <a:r>
-              <a:t>Empowering cross-functional teams to act before operational issues compound</a:t>
-            </a:r>
-          </a:p>
-        </p:txBody>
-      </p:sp>
-      <p:sp>
-        <p:nvSpPr>
-          <p:cNvPr id="3" name="Rounded Rectangle 2"/>
-          <p:cNvSpPr/>
-          <p:nvPr/>
-        </p:nvSpPr>
-        <p:spPr>
-          <a:xfrm>
-            <a:off x="731520" y="1645920"/>
-            <a:ext cx="10728655" cy="4663440"/>
-          </a:xfrm>
-          <a:prstGeom prst="roundRect">
             <a:avLst/>
           </a:prstGeom>
           <a:solidFill>
             <a:srgbClr val="F8FAFC"/>
           </a:solidFill>
-          <a:ln w="19050">
-            <a:solidFill>
-              <a:srgbClr val="E2E8F0"/>
-            </a:solidFill>
+          <a:ln>
+            <a:noFill/>
           </a:ln>
         </p:spPr>
         <p:style>
@@ -4973,14 +8080,14 @@
       </p:sp>
       <p:sp>
         <p:nvSpPr>
-          <p:cNvPr id="4" name="TextBox 3"/>
+          <p:cNvPr id="3" name="TextBox 2"/>
           <p:cNvSpPr txBox="1"/>
           <p:nvPr/>
         </p:nvSpPr>
         <p:spPr>
           <a:xfrm>
-            <a:off x="1005840" y="1828800"/>
-            <a:ext cx="10149840" cy="4297680"/>
+            <a:off x="731520" y="365760"/>
+            <a:ext cx="7315200" cy="365760"/>
           </a:xfrm>
           <a:prstGeom prst="rect">
             <a:avLst/>
@@ -4994,66 +8101,704 @@
           <a:lstStyle/>
           <a:p>
             <a:pPr>
-              <a:spcAft>
-                <a:spcPts val="1000"/>
-              </a:spcAft>
-              <a:defRPr sz="1350">
+              <a:defRPr sz="1000" b="1">
+                <a:solidFill>
+                  <a:srgbClr val="6366F1"/>
+                </a:solidFill>
+                <a:latin typeface="Arial"/>
+              </a:defRPr>
+            </a:pPr>
+            <a:r>
+              <a:t>MARKET POSITIONING</a:t>
+            </a:r>
+          </a:p>
+        </p:txBody>
+      </p:sp>
+      <p:sp>
+        <p:nvSpPr>
+          <p:cNvPr id="4" name="TextBox 3"/>
+          <p:cNvSpPr txBox="1"/>
+          <p:nvPr/>
+        </p:nvSpPr>
+        <p:spPr>
+          <a:xfrm>
+            <a:off x="731520" y="640080"/>
+            <a:ext cx="10515600" cy="640080"/>
+          </a:xfrm>
+          <a:prstGeom prst="rect">
+            <a:avLst/>
+          </a:prstGeom>
+          <a:noFill/>
+        </p:spPr>
+        <p:txBody>
+          <a:bodyPr wrap="square">
+            <a:spAutoFit/>
+          </a:bodyPr>
+          <a:lstStyle/>
+          <a:p>
+            <a:pPr>
+              <a:defRPr sz="2400" b="1">
                 <a:solidFill>
                   <a:srgbClr val="0F172A"/>
                 </a:solidFill>
-              </a:defRPr>
-            </a:pPr>
-            <a:r>
-              <a:t>• Retail Operations Managers: Uncover localized carrier hub breakdowns before customer delivery complaints trigger mass returns.</a:t>
-            </a:r>
-          </a:p>
-          <a:p>
-            <a:pPr>
-              <a:spcAft>
-                <a:spcPts val="1000"/>
-              </a:spcAft>
-              <a:defRPr sz="1350">
+                <a:latin typeface="Arial"/>
+              </a:defRPr>
+            </a:pPr>
+            <a:r>
+              <a:t>Competitive Advantage: Beyond Siloed BI</a:t>
+            </a:r>
+          </a:p>
+        </p:txBody>
+      </p:sp>
+      <p:sp>
+        <p:nvSpPr>
+          <p:cNvPr id="5" name="TextBox 4"/>
+          <p:cNvSpPr txBox="1"/>
+          <p:nvPr/>
+        </p:nvSpPr>
+        <p:spPr>
+          <a:xfrm>
+            <a:off x="731520" y="1234440"/>
+            <a:ext cx="10515600" cy="457200"/>
+          </a:xfrm>
+          <a:prstGeom prst="rect">
+            <a:avLst/>
+          </a:prstGeom>
+          <a:noFill/>
+        </p:spPr>
+        <p:txBody>
+          <a:bodyPr wrap="square">
+            <a:spAutoFit/>
+          </a:bodyPr>
+          <a:lstStyle/>
+          <a:p>
+            <a:pPr>
+              <a:defRPr sz="1200">
+                <a:solidFill>
+                  <a:srgbClr val="64748B"/>
+                </a:solidFill>
+                <a:latin typeface="Arial"/>
+              </a:defRPr>
+            </a:pPr>
+            <a:r>
+              <a:t>Why traditional enterprise dashboards leave millions in unaddressed operational risk</a:t>
+            </a:r>
+          </a:p>
+        </p:txBody>
+      </p:sp>
+      <p:sp>
+        <p:nvSpPr>
+          <p:cNvPr id="6" name="Rounded Rectangle 5"/>
+          <p:cNvSpPr/>
+          <p:nvPr/>
+        </p:nvSpPr>
+        <p:spPr>
+          <a:xfrm>
+            <a:off x="731520" y="1828800"/>
+            <a:ext cx="10728655" cy="4206240"/>
+          </a:xfrm>
+          <a:prstGeom prst="roundRect">
+            <a:avLst/>
+          </a:prstGeom>
+          <a:solidFill>
+            <a:srgbClr val="FFFFFF"/>
+          </a:solidFill>
+          <a:ln w="12700">
+            <a:solidFill>
+              <a:srgbClr val="E2E8F0"/>
+            </a:solidFill>
+          </a:ln>
+        </p:spPr>
+        <p:style>
+          <a:lnRef idx="1">
+            <a:schemeClr val="accent1"/>
+          </a:lnRef>
+          <a:fillRef idx="3">
+            <a:schemeClr val="accent1"/>
+          </a:fillRef>
+          <a:effectRef idx="2">
+            <a:schemeClr val="accent1"/>
+          </a:effectRef>
+          <a:fontRef idx="minor">
+            <a:schemeClr val="lt1"/>
+          </a:fontRef>
+        </p:style>
+        <p:txBody>
+          <a:bodyPr rtlCol="0" anchor="ctr"/>
+          <a:lstStyle/>
+          <a:p>
+            <a:pPr algn="ctr"/>
+          </a:p>
+        </p:txBody>
+      </p:sp>
+      <p:sp>
+        <p:nvSpPr>
+          <p:cNvPr id="7" name="TextBox 6"/>
+          <p:cNvSpPr txBox="1"/>
+          <p:nvPr/>
+        </p:nvSpPr>
+        <p:spPr>
+          <a:xfrm>
+            <a:off x="914400" y="1965960"/>
+            <a:ext cx="10362895" cy="365760"/>
+          </a:xfrm>
+          <a:prstGeom prst="rect">
+            <a:avLst/>
+          </a:prstGeom>
+          <a:noFill/>
+        </p:spPr>
+        <p:txBody>
+          <a:bodyPr wrap="none">
+            <a:spAutoFit/>
+          </a:bodyPr>
+          <a:lstStyle/>
+          <a:p>
+            <a:pPr>
+              <a:defRPr sz="1300" b="1">
                 <a:solidFill>
                   <a:srgbClr val="0F172A"/>
                 </a:solidFill>
-              </a:defRPr>
-            </a:pPr>
-            <a:r>
-              <a:t>• Supply Chain Analysts: Trace inventory stockouts directly to upstream transit delays and supplier defect rates.</a:t>
-            </a:r>
-          </a:p>
-          <a:p>
-            <a:pPr>
-              <a:spcAft>
-                <a:spcPts val="1000"/>
-              </a:spcAft>
-              <a:defRPr sz="1350">
-                <a:solidFill>
-                  <a:srgbClr val="0F172A"/>
-                </a:solidFill>
-              </a:defRPr>
-            </a:pPr>
-            <a:r>
-              <a:t>• Customer Experience &amp; Retention Teams: Understand why repeat purchase rates decline by connecting fulfillment failures to churn.</a:t>
-            </a:r>
-          </a:p>
-          <a:p>
-            <a:pPr>
-              <a:spcAft>
-                <a:spcPts val="1000"/>
-              </a:spcAft>
-              <a:defRPr sz="1350">
-                <a:solidFill>
-                  <a:srgbClr val="0F172A"/>
-                </a:solidFill>
-              </a:defRPr>
-            </a:pPr>
-            <a:r>
-              <a:t>• Risk &amp; Performance Executives: Receive executive PDF summaries with audit trails and verified conclusions for SLA negotiations.</a:t>
-            </a:r>
-          </a:p>
-        </p:txBody>
-      </p:sp>
+                <a:latin typeface="Arial"/>
+              </a:defRPr>
+            </a:pPr>
+            <a:r>
+              <a:t>Feature &amp; Capability Matrix</a:t>
+            </a:r>
+          </a:p>
+        </p:txBody>
+      </p:sp>
+      <p:graphicFrame>
+        <p:nvGraphicFramePr>
+          <p:cNvPr id="8" name="Table 7"/>
+          <p:cNvGraphicFramePr>
+            <a:graphicFrameLocks noGrp="1"/>
+          </p:cNvGraphicFramePr>
+          <p:nvPr/>
+        </p:nvGraphicFramePr>
+        <p:xfrm>
+          <a:off x="1005840" y="2377440"/>
+          <a:ext cx="10149840" cy="3291840"/>
+        </p:xfrm>
+        <a:graphic>
+          <a:graphicData uri="http://schemas.openxmlformats.org/drawingml/2006/table">
+            <a:tbl>
+              <a:tblPr firstRow="1" bandRow="1">
+                <a:tableStyleId>{5C22544A-7EE6-4342-B048-85BDC9FD1C3A}</a:tableStyleId>
+              </a:tblPr>
+              <a:tblGrid>
+                <a:gridCol w="3017520"/>
+                <a:gridCol w="2377440"/>
+                <a:gridCol w="2377440"/>
+                <a:gridCol w="2377440"/>
+              </a:tblGrid>
+              <a:tr h="548640">
+                <a:tc>
+                  <a:txBody>
+                    <a:bodyPr/>
+                    <a:lstStyle/>
+                    <a:p>
+                      <a:pPr>
+                        <a:defRPr b="1" sz="1100">
+                          <a:solidFill>
+                            <a:srgbClr val="FFFFFF"/>
+                          </a:solidFill>
+                        </a:defRPr>
+                      </a:pPr>
+                      <a:r>
+                        <a:t>Capability</a:t>
+                      </a:r>
+                    </a:p>
+                  </a:txBody>
+                  <a:tcPr>
+                    <a:solidFill>
+                      <a:srgbClr val="0F172A"/>
+                    </a:solidFill>
+                  </a:tcPr>
+                </a:tc>
+                <a:tc>
+                  <a:txBody>
+                    <a:bodyPr/>
+                    <a:lstStyle/>
+                    <a:p>
+                      <a:pPr>
+                        <a:defRPr b="1" sz="1100">
+                          <a:solidFill>
+                            <a:srgbClr val="FFFFFF"/>
+                          </a:solidFill>
+                        </a:defRPr>
+                      </a:pPr>
+                      <a:r>
+                        <a:t>Traditional BI (Tableau)</a:t>
+                      </a:r>
+                    </a:p>
+                  </a:txBody>
+                  <a:tcPr>
+                    <a:solidFill>
+                      <a:srgbClr val="0F172A"/>
+                    </a:solidFill>
+                  </a:tcPr>
+                </a:tc>
+                <a:tc>
+                  <a:txBody>
+                    <a:bodyPr/>
+                    <a:lstStyle/>
+                    <a:p>
+                      <a:pPr>
+                        <a:defRPr b="1" sz="1100">
+                          <a:solidFill>
+                            <a:srgbClr val="FFFFFF"/>
+                          </a:solidFill>
+                        </a:defRPr>
+                      </a:pPr>
+                      <a:r>
+                        <a:t>APM / Monitoring</a:t>
+                      </a:r>
+                    </a:p>
+                  </a:txBody>
+                  <a:tcPr>
+                    <a:solidFill>
+                      <a:srgbClr val="0F172A"/>
+                    </a:solidFill>
+                  </a:tcPr>
+                </a:tc>
+                <a:tc>
+                  <a:txBody>
+                    <a:bodyPr/>
+                    <a:lstStyle/>
+                    <a:p>
+                      <a:pPr>
+                        <a:defRPr b="1" sz="1100">
+                          <a:solidFill>
+                            <a:srgbClr val="FFFFFF"/>
+                          </a:solidFill>
+                        </a:defRPr>
+                      </a:pPr>
+                      <a:r>
+                        <a:t>SIGNALFIRE AI</a:t>
+                      </a:r>
+                    </a:p>
+                  </a:txBody>
+                  <a:tcPr>
+                    <a:solidFill>
+                      <a:srgbClr val="6366F1"/>
+                    </a:solidFill>
+                  </a:tcPr>
+                </a:tc>
+              </a:tr>
+              <a:tr h="548640">
+                <a:tc>
+                  <a:txBody>
+                    <a:bodyPr/>
+                    <a:lstStyle/>
+                    <a:p>
+                      <a:pPr>
+                        <a:defRPr sz="1000">
+                          <a:solidFill>
+                            <a:srgbClr val="0F172A"/>
+                          </a:solidFill>
+                        </a:defRPr>
+                      </a:pPr>
+                      <a:r>
+                        <a:t>Cross-Dataset Anomaly Correlation</a:t>
+                      </a:r>
+                    </a:p>
+                  </a:txBody>
+                  <a:tcPr/>
+                </a:tc>
+                <a:tc>
+                  <a:txBody>
+                    <a:bodyPr/>
+                    <a:lstStyle/>
+                    <a:p>
+                      <a:pPr>
+                        <a:defRPr sz="1000">
+                          <a:solidFill>
+                            <a:srgbClr val="64748B"/>
+                          </a:solidFill>
+                        </a:defRPr>
+                      </a:pPr>
+                      <a:r>
+                        <a:t>Manual cross-filtering</a:t>
+                      </a:r>
+                    </a:p>
+                  </a:txBody>
+                  <a:tcPr/>
+                </a:tc>
+                <a:tc>
+                  <a:txBody>
+                    <a:bodyPr/>
+                    <a:lstStyle/>
+                    <a:p>
+                      <a:pPr>
+                        <a:defRPr sz="1000">
+                          <a:solidFill>
+                            <a:srgbClr val="64748B"/>
+                          </a:solidFill>
+                        </a:defRPr>
+                      </a:pPr>
+                      <a:r>
+                        <a:t>Isolated metric alerts</a:t>
+                      </a:r>
+                    </a:p>
+                  </a:txBody>
+                  <a:tcPr/>
+                </a:tc>
+                <a:tc>
+                  <a:txBody>
+                    <a:bodyPr/>
+                    <a:lstStyle/>
+                    <a:p>
+                      <a:pPr>
+                        <a:defRPr sz="1000" b="1">
+                          <a:solidFill>
+                            <a:srgbClr val="6366F1"/>
+                          </a:solidFill>
+                        </a:defRPr>
+                      </a:pPr>
+                      <a:r>
+                        <a:t>Automated Lead-Lag Engine (r=0.89)</a:t>
+                      </a:r>
+                    </a:p>
+                  </a:txBody>
+                  <a:tcPr>
+                    <a:solidFill>
+                      <a:srgbClr val="EEF2FF"/>
+                    </a:solidFill>
+                  </a:tcPr>
+                </a:tc>
+              </a:tr>
+              <a:tr h="548640">
+                <a:tc>
+                  <a:txBody>
+                    <a:bodyPr/>
+                    <a:lstStyle/>
+                    <a:p>
+                      <a:pPr>
+                        <a:defRPr sz="1000">
+                          <a:solidFill>
+                            <a:srgbClr val="0F172A"/>
+                          </a:solidFill>
+                        </a:defRPr>
+                      </a:pPr>
+                      <a:r>
+                        <a:t>Noise-Robust Outlier Detection</a:t>
+                      </a:r>
+                    </a:p>
+                  </a:txBody>
+                  <a:tcPr/>
+                </a:tc>
+                <a:tc>
+                  <a:txBody>
+                    <a:bodyPr/>
+                    <a:lstStyle/>
+                    <a:p>
+                      <a:pPr>
+                        <a:defRPr sz="1000">
+                          <a:solidFill>
+                            <a:srgbClr val="64748B"/>
+                          </a:solidFill>
+                        </a:defRPr>
+                      </a:pPr>
+                      <a:r>
+                        <a:t>Rarely available (mean/std)</a:t>
+                      </a:r>
+                    </a:p>
+                  </a:txBody>
+                  <a:tcPr/>
+                </a:tc>
+                <a:tc>
+                  <a:txBody>
+                    <a:bodyPr/>
+                    <a:lstStyle/>
+                    <a:p>
+                      <a:pPr>
+                        <a:defRPr sz="1000">
+                          <a:solidFill>
+                            <a:srgbClr val="64748B"/>
+                          </a:solidFill>
+                        </a:defRPr>
+                      </a:pPr>
+                      <a:r>
+                        <a:t>Static % change thresholds</a:t>
+                      </a:r>
+                    </a:p>
+                  </a:txBody>
+                  <a:tcPr/>
+                </a:tc>
+                <a:tc>
+                  <a:txBody>
+                    <a:bodyPr/>
+                    <a:lstStyle/>
+                    <a:p>
+                      <a:pPr>
+                        <a:defRPr sz="1000" b="1">
+                          <a:solidFill>
+                            <a:srgbClr val="6366F1"/>
+                          </a:solidFill>
+                        </a:defRPr>
+                      </a:pPr>
+                      <a:r>
+                        <a:t>Robust MAD &amp; IQR Fences</a:t>
+                      </a:r>
+                    </a:p>
+                  </a:txBody>
+                  <a:tcPr>
+                    <a:solidFill>
+                      <a:srgbClr val="EEF2FF"/>
+                    </a:solidFill>
+                  </a:tcPr>
+                </a:tc>
+              </a:tr>
+              <a:tr h="548640">
+                <a:tc>
+                  <a:txBody>
+                    <a:bodyPr/>
+                    <a:lstStyle/>
+                    <a:p>
+                      <a:pPr>
+                        <a:defRPr sz="1000">
+                          <a:solidFill>
+                            <a:srgbClr val="0F172A"/>
+                          </a:solidFill>
+                        </a:defRPr>
+                      </a:pPr>
+                      <a:r>
+                        <a:t>Epistemic Fact/Hypothesis Rigor</a:t>
+                      </a:r>
+                    </a:p>
+                  </a:txBody>
+                  <a:tcPr/>
+                </a:tc>
+                <a:tc>
+                  <a:txBody>
+                    <a:bodyPr/>
+                    <a:lstStyle/>
+                    <a:p>
+                      <a:pPr>
+                        <a:defRPr sz="1000">
+                          <a:solidFill>
+                            <a:srgbClr val="64748B"/>
+                          </a:solidFill>
+                        </a:defRPr>
+                      </a:pPr>
+                      <a:r>
+                        <a:t>No distinction</a:t>
+                      </a:r>
+                    </a:p>
+                  </a:txBody>
+                  <a:tcPr/>
+                </a:tc>
+                <a:tc>
+                  <a:txBody>
+                    <a:bodyPr/>
+                    <a:lstStyle/>
+                    <a:p>
+                      <a:pPr>
+                        <a:defRPr sz="1000">
+                          <a:solidFill>
+                            <a:srgbClr val="64748B"/>
+                          </a:solidFill>
+                        </a:defRPr>
+                      </a:pPr>
+                      <a:r>
+                        <a:t>No distinction</a:t>
+                      </a:r>
+                    </a:p>
+                  </a:txBody>
+                  <a:tcPr/>
+                </a:tc>
+                <a:tc>
+                  <a:txBody>
+                    <a:bodyPr/>
+                    <a:lstStyle/>
+                    <a:p>
+                      <a:pPr>
+                        <a:defRPr sz="1000" b="1">
+                          <a:solidFill>
+                            <a:srgbClr val="6366F1"/>
+                          </a:solidFill>
+                        </a:defRPr>
+                      </a:pPr>
+                      <a:r>
+                        <a:t>Strict Epistemic Architecture</a:t>
+                      </a:r>
+                    </a:p>
+                  </a:txBody>
+                  <a:tcPr>
+                    <a:solidFill>
+                      <a:srgbClr val="EEF2FF"/>
+                    </a:solidFill>
+                  </a:tcPr>
+                </a:tc>
+              </a:tr>
+              <a:tr h="548640">
+                <a:tc>
+                  <a:txBody>
+                    <a:bodyPr/>
+                    <a:lstStyle/>
+                    <a:p>
+                      <a:pPr>
+                        <a:defRPr sz="1000">
+                          <a:solidFill>
+                            <a:srgbClr val="0F172A"/>
+                          </a:solidFill>
+                        </a:defRPr>
+                      </a:pPr>
+                      <a:r>
+                        <a:t>Analytical Engine</a:t>
+                      </a:r>
+                    </a:p>
+                  </a:txBody>
+                  <a:tcPr/>
+                </a:tc>
+                <a:tc>
+                  <a:txBody>
+                    <a:bodyPr/>
+                    <a:lstStyle/>
+                    <a:p>
+                      <a:pPr>
+                        <a:defRPr sz="1000">
+                          <a:solidFill>
+                            <a:srgbClr val="64748B"/>
+                          </a:solidFill>
+                        </a:defRPr>
+                      </a:pPr>
+                      <a:r>
+                        <a:t>External SQL warehouse</a:t>
+                      </a:r>
+                    </a:p>
+                  </a:txBody>
+                  <a:tcPr/>
+                </a:tc>
+                <a:tc>
+                  <a:txBody>
+                    <a:bodyPr/>
+                    <a:lstStyle/>
+                    <a:p>
+                      <a:pPr>
+                        <a:defRPr sz="1000">
+                          <a:solidFill>
+                            <a:srgbClr val="64748B"/>
+                          </a:solidFill>
+                        </a:defRPr>
+                      </a:pPr>
+                      <a:r>
+                        <a:t>Proprietary timeseries</a:t>
+                      </a:r>
+                    </a:p>
+                  </a:txBody>
+                  <a:tcPr/>
+                </a:tc>
+                <a:tc>
+                  <a:txBody>
+                    <a:bodyPr/>
+                    <a:lstStyle/>
+                    <a:p>
+                      <a:pPr>
+                        <a:defRPr sz="1000" b="1">
+                          <a:solidFill>
+                            <a:srgbClr val="6366F1"/>
+                          </a:solidFill>
+                        </a:defRPr>
+                      </a:pPr>
+                      <a:r>
+                        <a:t>Exasol Personal + DuckDB OLAP</a:t>
+                      </a:r>
+                    </a:p>
+                  </a:txBody>
+                  <a:tcPr>
+                    <a:solidFill>
+                      <a:srgbClr val="EEF2FF"/>
+                    </a:solidFill>
+                  </a:tcPr>
+                </a:tc>
+              </a:tr>
+              <a:tr h="548640">
+                <a:tc>
+                  <a:txBody>
+                    <a:bodyPr/>
+                    <a:lstStyle/>
+                    <a:p>
+                      <a:pPr>
+                        <a:defRPr sz="1000">
+                          <a:solidFill>
+                            <a:srgbClr val="0F172A"/>
+                          </a:solidFill>
+                        </a:defRPr>
+                      </a:pPr>
+                      <a:r>
+                        <a:t>Decision Support &amp; What-If</a:t>
+                      </a:r>
+                    </a:p>
+                  </a:txBody>
+                  <a:tcPr/>
+                </a:tc>
+                <a:tc>
+                  <a:txBody>
+                    <a:bodyPr/>
+                    <a:lstStyle/>
+                    <a:p>
+                      <a:pPr>
+                        <a:defRPr sz="1000">
+                          <a:solidFill>
+                            <a:srgbClr val="64748B"/>
+                          </a:solidFill>
+                        </a:defRPr>
+                      </a:pPr>
+                      <a:r>
+                        <a:t>Static parameter reports</a:t>
+                      </a:r>
+                    </a:p>
+                  </a:txBody>
+                  <a:tcPr/>
+                </a:tc>
+                <a:tc>
+                  <a:txBody>
+                    <a:bodyPr/>
+                    <a:lstStyle/>
+                    <a:p>
+                      <a:pPr>
+                        <a:defRPr sz="1000">
+                          <a:solidFill>
+                            <a:srgbClr val="64748B"/>
+                          </a:solidFill>
+                        </a:defRPr>
+                      </a:pPr>
+                      <a:r>
+                        <a:t>Runbook links only</a:t>
+                      </a:r>
+                    </a:p>
+                  </a:txBody>
+                  <a:tcPr/>
+                </a:tc>
+                <a:tc>
+                  <a:txBody>
+                    <a:bodyPr/>
+                    <a:lstStyle/>
+                    <a:p>
+                      <a:pPr>
+                        <a:defRPr sz="1000" b="1">
+                          <a:solidFill>
+                            <a:srgbClr val="6366F1"/>
+                          </a:solidFill>
+                        </a:defRPr>
+                      </a:pPr>
+                      <a:r>
+                        <a:t>Live Multi-Variable Stress-Testing</a:t>
+                      </a:r>
+                    </a:p>
+                  </a:txBody>
+                  <a:tcPr>
+                    <a:solidFill>
+                      <a:srgbClr val="EEF2FF"/>
+                    </a:solidFill>
+                  </a:tcPr>
+                </a:tc>
+              </a:tr>
+            </a:tbl>
+          </a:graphicData>
+        </a:graphic>
+      </p:graphicFrame>
     </p:spTree>
   </p:cSld>
   <p:clrMapOvr>
